--- a/Course_Recommendation_System.pptx
+++ b/Course_Recommendation_System.pptx
@@ -1,20 +1,20 @@
 
 <file path=ppt/presentation.xml><?xml version="1.0" encoding="utf-8"?>
-<p:presentation xmlns:a="http://schemas.openxmlformats.org/drawingml/2006/main" xmlns:r="http://schemas.openxmlformats.org/officeDocument/2006/relationships" xmlns:p="http://schemas.openxmlformats.org/presentationml/2006/main" saveSubsetFonts="1" autoCompressPictures="0">
+<p:presentation xmlns:a="http://schemas.openxmlformats.org/drawingml/2006/main" xmlns:r="http://schemas.openxmlformats.org/officeDocument/2006/relationships" xmlns:p="http://schemas.openxmlformats.org/presentationml/2006/main" autoCompressPictures="0">
   <p:sldMasterIdLst>
     <p:sldMasterId id="2147483648" r:id="rId1"/>
   </p:sldMasterIdLst>
+  <p:notesMasterIdLst>
+    <p:notesMasterId r:id="rId4"/>
+  </p:notesMasterIdLst>
   <p:sldIdLst>
-    <p:sldId id="256" r:id="rId2"/>
-    <p:sldId id="257" r:id="rId3"/>
-    <p:sldId id="258" r:id="rId4"/>
-    <p:sldId id="259" r:id="rId5"/>
-    <p:sldId id="260" r:id="rId6"/>
-    <p:sldId id="261" r:id="rId7"/>
+    <p:sldId id="256" r:id="rId3"/>
+    <p:sldId id="257" r:id="rId5"/>
+    <p:sldId id="258" r:id="rId6"/>
+    <p:sldId id="259" r:id="rId7"/>
+    <p:sldId id="260" r:id="rId8"/>
+    <p:sldId id="261" r:id="rId9"/>
   </p:sldIdLst>
-  <p:notesMasterIdLst>
-    <p:notesMasterId r:id="rId8"/>
-  </p:notesMasterIdLst>
   <p:sldSz cx="12192000" cy="6858000"/>
   <p:notesSz cx="6858000" cy="12192000"/>
   <p:defaultTextStyle>
@@ -194,7 +194,6 @@
           <a:p>
             <a:fld id="{5282F153-3F37-0F45-9E97-73ACFA13230C}" type="datetimeFigureOut">
               <a:rPr lang="en-US"/>
-              <a:t>7/23/19</a:t>
             </a:fld>
             <a:endParaRPr lang="en-US"/>
           </a:p>
@@ -261,6 +260,7 @@
               <a:rPr lang="en-US"/>
               <a:t>Click to edit Master text styles</a:t>
             </a:r>
+            <a:endParaRPr lang="en-US"/>
           </a:p>
           <a:p>
             <a:pPr lvl="1"/>
@@ -268,6 +268,7 @@
               <a:rPr lang="en-US"/>
               <a:t>Second level</a:t>
             </a:r>
+            <a:endParaRPr lang="en-US"/>
           </a:p>
           <a:p>
             <a:pPr lvl="2"/>
@@ -275,6 +276,7 @@
               <a:rPr lang="en-US"/>
               <a:t>Third level</a:t>
             </a:r>
+            <a:endParaRPr lang="en-US"/>
           </a:p>
           <a:p>
             <a:pPr lvl="3"/>
@@ -282,6 +284,7 @@
               <a:rPr lang="en-US"/>
               <a:t>Fourth level</a:t>
             </a:r>
+            <a:endParaRPr lang="en-US"/>
           </a:p>
           <a:p>
             <a:pPr lvl="4"/>
@@ -289,6 +292,7 @@
               <a:rPr lang="en-US"/>
               <a:t>Fifth level</a:t>
             </a:r>
+            <a:endParaRPr lang="en-US"/>
           </a:p>
         </p:txBody>
       </p:sp>
@@ -352,18 +356,12 @@
           <a:p>
             <a:fld id="{CE5E9CC1-C706-0F49-92D6-E571CC5EEA8F}" type="slidenum">
               <a:rPr lang="en-US"/>
-              <a:t>‹#›</a:t>
             </a:fld>
             <a:endParaRPr lang="en-US"/>
           </a:p>
         </p:txBody>
       </p:sp>
     </p:spTree>
-    <p:extLst>
-      <p:ext uri="{BB962C8B-B14F-4D97-AF65-F5344CB8AC3E}">
-        <p14:creationId xmlns:p14="http://schemas.microsoft.com/office/powerpoint/2010/main" val="1024086991"/>
-      </p:ext>
-    </p:extLst>
   </p:cSld>
   <p:clrMap bg1="lt1" tx1="dk1" bg2="lt2" tx2="dk2" accent1="accent1" accent2="accent2" accent3="accent3" accent4="accent4" accent5="accent5" accent6="accent6" hlink="hlink" folHlink="folHlink"/>
   <p:notesStyle>
@@ -505,10 +503,6 @@
           <a:bodyPr/>
           <a:lstStyle/>
           <a:p>
-            <a:r>
-              <a:rPr lang="en-US" dirty="0"/>
-              <a:t/>
-            </a:r>
             <a:endParaRPr lang="en-US" dirty="0"/>
           </a:p>
         </p:txBody>
@@ -530,18 +524,12 @@
           <a:p>
             <a:fld id="{F7021451-1387-4CA6-816F-3879F97B5CBC}" type="slidenum">
               <a:rPr lang="en-US"/>
-              <a:t>1</a:t>
             </a:fld>
             <a:endParaRPr lang="en-US"/>
           </a:p>
         </p:txBody>
       </p:sp>
     </p:spTree>
-    <p:extLst>
-      <p:ext uri="{BB962C8B-B14F-4D97-AF65-F5344CB8AC3E}">
-        <p14:creationId xmlns:p14="http://schemas.microsoft.com/office/powerpoint/2010/main" val="1024086991"/>
-      </p:ext>
-    </p:extLst>
   </p:cSld>
   <p:clrMapOvr>
     <a:masterClrMapping/>
@@ -593,10 +581,6 @@
           <a:bodyPr/>
           <a:lstStyle/>
           <a:p>
-            <a:r>
-              <a:rPr lang="en-US" dirty="0"/>
-              <a:t/>
-            </a:r>
             <a:endParaRPr lang="en-US" dirty="0"/>
           </a:p>
         </p:txBody>
@@ -618,18 +602,12 @@
           <a:p>
             <a:fld id="{F7021451-1387-4CA6-816F-3879F97B5CBC}" type="slidenum">
               <a:rPr lang="en-US"/>
-              <a:t>2</a:t>
             </a:fld>
             <a:endParaRPr lang="en-US"/>
           </a:p>
         </p:txBody>
       </p:sp>
     </p:spTree>
-    <p:extLst>
-      <p:ext uri="{BB962C8B-B14F-4D97-AF65-F5344CB8AC3E}">
-        <p14:creationId xmlns:p14="http://schemas.microsoft.com/office/powerpoint/2010/main" val="1024086991"/>
-      </p:ext>
-    </p:extLst>
   </p:cSld>
   <p:clrMapOvr>
     <a:masterClrMapping/>
@@ -681,10 +659,6 @@
           <a:bodyPr/>
           <a:lstStyle/>
           <a:p>
-            <a:r>
-              <a:rPr lang="en-US" dirty="0"/>
-              <a:t/>
-            </a:r>
             <a:endParaRPr lang="en-US" dirty="0"/>
           </a:p>
         </p:txBody>
@@ -706,18 +680,12 @@
           <a:p>
             <a:fld id="{F7021451-1387-4CA6-816F-3879F97B5CBC}" type="slidenum">
               <a:rPr lang="en-US"/>
-              <a:t>3</a:t>
             </a:fld>
             <a:endParaRPr lang="en-US"/>
           </a:p>
         </p:txBody>
       </p:sp>
     </p:spTree>
-    <p:extLst>
-      <p:ext uri="{BB962C8B-B14F-4D97-AF65-F5344CB8AC3E}">
-        <p14:creationId xmlns:p14="http://schemas.microsoft.com/office/powerpoint/2010/main" val="1024086991"/>
-      </p:ext>
-    </p:extLst>
   </p:cSld>
   <p:clrMapOvr>
     <a:masterClrMapping/>
@@ -769,10 +737,6 @@
           <a:bodyPr/>
           <a:lstStyle/>
           <a:p>
-            <a:r>
-              <a:rPr lang="en-US" dirty="0"/>
-              <a:t/>
-            </a:r>
             <a:endParaRPr lang="en-US" dirty="0"/>
           </a:p>
         </p:txBody>
@@ -794,18 +758,12 @@
           <a:p>
             <a:fld id="{F7021451-1387-4CA6-816F-3879F97B5CBC}" type="slidenum">
               <a:rPr lang="en-US"/>
-              <a:t>4</a:t>
             </a:fld>
             <a:endParaRPr lang="en-US"/>
           </a:p>
         </p:txBody>
       </p:sp>
     </p:spTree>
-    <p:extLst>
-      <p:ext uri="{BB962C8B-B14F-4D97-AF65-F5344CB8AC3E}">
-        <p14:creationId xmlns:p14="http://schemas.microsoft.com/office/powerpoint/2010/main" val="1024086991"/>
-      </p:ext>
-    </p:extLst>
   </p:cSld>
   <p:clrMapOvr>
     <a:masterClrMapping/>
@@ -857,10 +815,6 @@
           <a:bodyPr/>
           <a:lstStyle/>
           <a:p>
-            <a:r>
-              <a:rPr lang="en-US" dirty="0"/>
-              <a:t/>
-            </a:r>
             <a:endParaRPr lang="en-US" dirty="0"/>
           </a:p>
         </p:txBody>
@@ -882,18 +836,12 @@
           <a:p>
             <a:fld id="{F7021451-1387-4CA6-816F-3879F97B5CBC}" type="slidenum">
               <a:rPr lang="en-US"/>
-              <a:t>5</a:t>
             </a:fld>
             <a:endParaRPr lang="en-US"/>
           </a:p>
         </p:txBody>
       </p:sp>
     </p:spTree>
-    <p:extLst>
-      <p:ext uri="{BB962C8B-B14F-4D97-AF65-F5344CB8AC3E}">
-        <p14:creationId xmlns:p14="http://schemas.microsoft.com/office/powerpoint/2010/main" val="1024086991"/>
-      </p:ext>
-    </p:extLst>
   </p:cSld>
   <p:clrMapOvr>
     <a:masterClrMapping/>
@@ -945,10 +893,6 @@
           <a:bodyPr/>
           <a:lstStyle/>
           <a:p>
-            <a:r>
-              <a:rPr lang="en-US" dirty="0"/>
-              <a:t/>
-            </a:r>
             <a:endParaRPr lang="en-US" dirty="0"/>
           </a:p>
         </p:txBody>
@@ -970,18 +914,12 @@
           <a:p>
             <a:fld id="{F7021451-1387-4CA6-816F-3879F97B5CBC}" type="slidenum">
               <a:rPr lang="en-US"/>
-              <a:t>6</a:t>
             </a:fld>
             <a:endParaRPr lang="en-US"/>
           </a:p>
         </p:txBody>
       </p:sp>
     </p:spTree>
-    <p:extLst>
-      <p:ext uri="{BB962C8B-B14F-4D97-AF65-F5344CB8AC3E}">
-        <p14:creationId xmlns:p14="http://schemas.microsoft.com/office/powerpoint/2010/main" val="1024086991"/>
-      </p:ext>
-    </p:extLst>
   </p:cSld>
   <p:clrMapOvr>
     <a:masterClrMapping/>
@@ -1022,6 +960,11 @@
 <file path=ppt/slideMasters/slideMaster1.xml><?xml version="1.0" encoding="utf-8"?>
 <p:sldMaster xmlns:a="http://schemas.openxmlformats.org/drawingml/2006/main" xmlns:r="http://schemas.openxmlformats.org/officeDocument/2006/relationships" xmlns:p="http://schemas.openxmlformats.org/presentationml/2006/main">
   <p:cSld>
+    <p:bg>
+      <p:bgRef idx="1001">
+        <a:schemeClr val="bg1"/>
+      </p:bgRef>
+    </p:bg>
     <p:spTree>
       <p:nvGrpSpPr>
         <p:cNvPr id="1" name=""/>
@@ -1065,7 +1008,7 @@
         <a:spcBef>
           <a:spcPct val="20000"/>
         </a:spcBef>
-        <a:buFont typeface="Arial" pitchFamily="34" charset="0"/>
+        <a:buFont typeface="Arial" panose="020B0604020202020204" pitchFamily="34" charset="0"/>
         <a:buChar char="•"/>
         <a:defRPr sz="3200" kern="1200">
           <a:solidFill>
@@ -1080,7 +1023,7 @@
         <a:spcBef>
           <a:spcPct val="20000"/>
         </a:spcBef>
-        <a:buFont typeface="Arial" pitchFamily="34" charset="0"/>
+        <a:buFont typeface="Arial" panose="020B0604020202020204" pitchFamily="34" charset="0"/>
         <a:buChar char="–"/>
         <a:defRPr sz="2800" kern="1200">
           <a:solidFill>
@@ -1095,7 +1038,7 @@
         <a:spcBef>
           <a:spcPct val="20000"/>
         </a:spcBef>
-        <a:buFont typeface="Arial" pitchFamily="34" charset="0"/>
+        <a:buFont typeface="Arial" panose="020B0604020202020204" pitchFamily="34" charset="0"/>
         <a:buChar char="•"/>
         <a:defRPr sz="2400" kern="1200">
           <a:solidFill>
@@ -1110,7 +1053,7 @@
         <a:spcBef>
           <a:spcPct val="20000"/>
         </a:spcBef>
-        <a:buFont typeface="Arial" pitchFamily="34" charset="0"/>
+        <a:buFont typeface="Arial" panose="020B0604020202020204" pitchFamily="34" charset="0"/>
         <a:buChar char="–"/>
         <a:defRPr sz="2000" kern="1200">
           <a:solidFill>
@@ -1125,7 +1068,7 @@
         <a:spcBef>
           <a:spcPct val="20000"/>
         </a:spcBef>
-        <a:buFont typeface="Arial" pitchFamily="34" charset="0"/>
+        <a:buFont typeface="Arial" panose="020B0604020202020204" pitchFamily="34" charset="0"/>
         <a:buChar char="»"/>
         <a:defRPr sz="2000" kern="1200">
           <a:solidFill>
@@ -1140,7 +1083,7 @@
         <a:spcBef>
           <a:spcPct val="20000"/>
         </a:spcBef>
-        <a:buFont typeface="Arial" pitchFamily="34" charset="0"/>
+        <a:buFont typeface="Arial" panose="020B0604020202020204" pitchFamily="34" charset="0"/>
         <a:buChar char="•"/>
         <a:defRPr sz="2000" kern="1200">
           <a:solidFill>
@@ -1155,7 +1098,7 @@
         <a:spcBef>
           <a:spcPct val="20000"/>
         </a:spcBef>
-        <a:buFont typeface="Arial" pitchFamily="34" charset="0"/>
+        <a:buFont typeface="Arial" panose="020B0604020202020204" pitchFamily="34" charset="0"/>
         <a:buChar char="•"/>
         <a:defRPr sz="2000" kern="1200">
           <a:solidFill>
@@ -1170,7 +1113,7 @@
         <a:spcBef>
           <a:spcPct val="20000"/>
         </a:spcBef>
-        <a:buFont typeface="Arial" pitchFamily="34" charset="0"/>
+        <a:buFont typeface="Arial" panose="020B0604020202020204" pitchFamily="34" charset="0"/>
         <a:buChar char="•"/>
         <a:defRPr sz="2000" kern="1200">
           <a:solidFill>
@@ -1185,7 +1128,7 @@
         <a:spcBef>
           <a:spcPct val="20000"/>
         </a:spcBef>
-        <a:buFont typeface="Arial" pitchFamily="34" charset="0"/>
+        <a:buFont typeface="Arial" panose="020B0604020202020204" pitchFamily="34" charset="0"/>
         <a:buChar char="•"/>
         <a:defRPr sz="2000" kern="1200">
           <a:solidFill>
@@ -1298,12 +1241,13 @@
 
 <file path=ppt/slides/slide1.xml><?xml version="1.0" encoding="utf-8"?>
 <p:sld xmlns:a="http://schemas.openxmlformats.org/drawingml/2006/main" xmlns:r="http://schemas.openxmlformats.org/officeDocument/2006/relationships" xmlns:p="http://schemas.openxmlformats.org/presentationml/2006/main">
-  <p:cSld name="Slide 1">
+  <p:cSld>
     <p:bg>
       <p:bgPr>
         <a:solidFill>
           <a:srgbClr val="023436"/>
         </a:solidFill>
+        <a:effectLst/>
       </p:bgPr>
     </p:bg>
     <p:spTree>
@@ -1353,8 +1297,8 @@
         </p:nvSpPr>
         <p:spPr>
           <a:xfrm>
-            <a:off x="10789920" y="1737360"/>
-            <a:ext cx="640080" cy="-1005840"/>
+            <a:off x="10789920" y="731520"/>
+            <a:ext cx="640080" cy="1005840"/>
           </a:xfrm>
           <a:prstGeom prst="line">
             <a:avLst/>
@@ -1378,8 +1322,8 @@
         </p:nvSpPr>
         <p:spPr>
           <a:xfrm>
-            <a:off x="10789920" y="1737360"/>
-            <a:ext cx="-822960" cy="1005840"/>
+            <a:off x="9966960" y="1737360"/>
+            <a:ext cx="822960" cy="1005840"/>
           </a:xfrm>
           <a:prstGeom prst="line">
             <a:avLst/>
@@ -1478,8 +1422,8 @@
         </p:nvSpPr>
         <p:spPr>
           <a:xfrm>
-            <a:off x="10424160" y="3931920"/>
-            <a:ext cx="-914400" cy="1005840"/>
+            <a:off x="9509760" y="3931920"/>
+            <a:ext cx="914400" cy="1005840"/>
           </a:xfrm>
           <a:prstGeom prst="line">
             <a:avLst/>
@@ -1503,8 +1447,8 @@
         </p:nvSpPr>
         <p:spPr>
           <a:xfrm>
-            <a:off x="11155680" y="3108960"/>
-            <a:ext cx="-731520" cy="822960"/>
+            <a:off x="10424160" y="3108960"/>
+            <a:ext cx="731520" cy="822960"/>
           </a:xfrm>
           <a:prstGeom prst="line">
             <a:avLst/>
@@ -1537,7 +1481,6 @@
           <a:solidFill>
             <a:srgbClr val="02C39A"/>
           </a:solidFill>
-          <a:ln/>
         </p:spPr>
       </p:sp>
       <p:sp>
@@ -1557,7 +1500,6 @@
           <a:solidFill>
             <a:srgbClr val="00A896"/>
           </a:solidFill>
-          <a:ln/>
         </p:spPr>
       </p:sp>
       <p:sp>
@@ -1577,7 +1519,6 @@
           <a:solidFill>
             <a:srgbClr val="02C39A"/>
           </a:solidFill>
-          <a:ln/>
         </p:spPr>
       </p:sp>
       <p:sp>
@@ -1597,7 +1538,6 @@
           <a:solidFill>
             <a:srgbClr val="00A896"/>
           </a:solidFill>
-          <a:ln/>
         </p:spPr>
       </p:sp>
       <p:sp>
@@ -1617,7 +1557,6 @@
           <a:solidFill>
             <a:srgbClr val="02C39A"/>
           </a:solidFill>
-          <a:ln/>
         </p:spPr>
       </p:sp>
       <p:sp>
@@ -1637,7 +1576,6 @@
           <a:solidFill>
             <a:srgbClr val="00A896"/>
           </a:solidFill>
-          <a:ln/>
         </p:spPr>
       </p:sp>
       <p:sp>
@@ -1657,7 +1595,6 @@
           <a:solidFill>
             <a:srgbClr val="02C39A"/>
           </a:solidFill>
-          <a:ln/>
         </p:spPr>
       </p:sp>
       <p:sp>
@@ -1677,7 +1614,6 @@
           <a:solidFill>
             <a:srgbClr val="00A896"/>
           </a:solidFill>
-          <a:ln/>
         </p:spPr>
       </p:sp>
       <p:sp>
@@ -1695,23 +1631,22 @@
             <a:avLst/>
           </a:prstGeom>
           <a:noFill/>
-          <a:ln/>
-        </p:spPr>
-        <p:txBody>
-          <a:bodyPr wrap="square" rtlCol="0" anchor="ctr"/>
-          <a:lstStyle/>
-          <a:p>
-            <a:pPr indent="0" marL="0">
-              <a:buNone/>
-            </a:pPr>
-            <a:r>
-              <a:rPr lang="en-US" sz="1200" b="1" spc="200" kern="0" dirty="0">
+        </p:spPr>
+        <p:txBody>
+          <a:bodyPr wrap="square" rtlCol="0" anchor="ctr"/>
+          <a:lstStyle/>
+          <a:p>
+            <a:pPr marL="0" indent="0">
+              <a:buNone/>
+            </a:pPr>
+            <a:r>
+              <a:rPr lang="en-US" sz="1200" b="1" kern="0" spc="200" dirty="0">
                 <a:solidFill>
                   <a:srgbClr val="02C39A"/>
                 </a:solidFill>
-                <a:latin typeface="Calibri" pitchFamily="34" charset="0"/>
-                <a:ea typeface="Calibri" pitchFamily="34" charset="-122"/>
-                <a:cs typeface="Calibri" pitchFamily="34" charset="-120"/>
+                <a:latin typeface="Calibri" panose="020F0502020204030204" pitchFamily="34" charset="0"/>
+                <a:ea typeface="Calibri" panose="020F0502020204030204" pitchFamily="34" charset="-122"/>
+                <a:cs typeface="Calibri" panose="020F0502020204030204" pitchFamily="34" charset="-120"/>
               </a:rPr>
               <a:t>DATA STRUCTURES AND ALGORITHMS – 3   |   25CS2103E   |   PBL PROJECT</a:t>
             </a:r>
@@ -1734,13 +1669,12 @@
             <a:avLst/>
           </a:prstGeom>
           <a:noFill/>
-          <a:ln/>
-        </p:spPr>
-        <p:txBody>
-          <a:bodyPr wrap="square" rtlCol="0" anchor="ctr"/>
-          <a:lstStyle/>
-          <a:p>
-            <a:pPr indent="0" marL="0">
+        </p:spPr>
+        <p:txBody>
+          <a:bodyPr wrap="square" rtlCol="0" anchor="ctr"/>
+          <a:lstStyle/>
+          <a:p>
+            <a:pPr marL="0" indent="0">
               <a:lnSpc>
                 <a:spcPct val="105000"/>
               </a:lnSpc>
@@ -1751,16 +1685,16 @@
                 <a:solidFill>
                   <a:srgbClr val="FFFFFF"/>
                 </a:solidFill>
-                <a:latin typeface="Cambria" pitchFamily="34" charset="0"/>
-                <a:ea typeface="Cambria" pitchFamily="34" charset="-122"/>
-                <a:cs typeface="Cambria" pitchFamily="34" charset="-120"/>
+                <a:latin typeface="Cambria" panose="02040503050406030204" pitchFamily="34" charset="0"/>
+                <a:ea typeface="Cambria" panose="02040503050406030204" pitchFamily="34" charset="-122"/>
+                <a:cs typeface="Cambria" panose="02040503050406030204" pitchFamily="34" charset="-120"/>
               </a:rPr>
               <a:t>Course Recommendation</a:t>
             </a:r>
             <a:endParaRPr lang="en-US" sz="4400" dirty="0"/>
           </a:p>
           <a:p>
-            <a:pPr indent="0" marL="0">
+            <a:pPr marL="0" indent="0">
               <a:lnSpc>
                 <a:spcPct val="105000"/>
               </a:lnSpc>
@@ -1771,9 +1705,9 @@
                 <a:solidFill>
                   <a:srgbClr val="FFFFFF"/>
                 </a:solidFill>
-                <a:latin typeface="Cambria" pitchFamily="34" charset="0"/>
-                <a:ea typeface="Cambria" pitchFamily="34" charset="-122"/>
-                <a:cs typeface="Cambria" pitchFamily="34" charset="-120"/>
+                <a:latin typeface="Cambria" panose="02040503050406030204" pitchFamily="34" charset="0"/>
+                <a:ea typeface="Cambria" panose="02040503050406030204" pitchFamily="34" charset="-122"/>
+                <a:cs typeface="Cambria" panose="02040503050406030204" pitchFamily="34" charset="-120"/>
               </a:rPr>
               <a:t>System</a:t>
             </a:r>
@@ -1796,13 +1730,12 @@
             <a:avLst/>
           </a:prstGeom>
           <a:noFill/>
-          <a:ln/>
-        </p:spPr>
-        <p:txBody>
-          <a:bodyPr wrap="square" rtlCol="0" anchor="ctr"/>
-          <a:lstStyle/>
-          <a:p>
-            <a:pPr indent="0" marL="0">
+        </p:spPr>
+        <p:txBody>
+          <a:bodyPr wrap="square" rtlCol="0" anchor="ctr"/>
+          <a:lstStyle/>
+          <a:p>
+            <a:pPr marL="0" indent="0">
               <a:lnSpc>
                 <a:spcPct val="120000"/>
               </a:lnSpc>
@@ -1813,16 +1746,16 @@
                 <a:solidFill>
                   <a:srgbClr val="CFE8E6"/>
                 </a:solidFill>
-                <a:latin typeface="Calibri" pitchFamily="34" charset="0"/>
-                <a:ea typeface="Calibri" pitchFamily="34" charset="-122"/>
-                <a:cs typeface="Calibri" pitchFamily="34" charset="-120"/>
+                <a:latin typeface="Calibri" panose="020F0502020204030204" pitchFamily="34" charset="0"/>
+                <a:ea typeface="Calibri" panose="020F0502020204030204" pitchFamily="34" charset="-122"/>
+                <a:cs typeface="Calibri" panose="020F0502020204030204" pitchFamily="34" charset="-120"/>
               </a:rPr>
               <a:t>An algorithm-driven engine that helps students search, match, and plan</a:t>
             </a:r>
             <a:endParaRPr lang="en-US" sz="1500" dirty="0"/>
           </a:p>
           <a:p>
-            <a:pPr indent="0" marL="0">
+            <a:pPr marL="0" indent="0">
               <a:lnSpc>
                 <a:spcPct val="120000"/>
               </a:lnSpc>
@@ -1833,9 +1766,9 @@
                 <a:solidFill>
                   <a:srgbClr val="CFE8E6"/>
                 </a:solidFill>
-                <a:latin typeface="Calibri" pitchFamily="34" charset="0"/>
-                <a:ea typeface="Calibri" pitchFamily="34" charset="-122"/>
-                <a:cs typeface="Calibri" pitchFamily="34" charset="-120"/>
+                <a:latin typeface="Calibri" panose="020F0502020204030204" pitchFamily="34" charset="0"/>
+                <a:ea typeface="Calibri" panose="020F0502020204030204" pitchFamily="34" charset="-122"/>
+                <a:cs typeface="Calibri" panose="020F0502020204030204" pitchFamily="34" charset="-120"/>
               </a:rPr>
               <a:t>courses based on interests, prerequisites, and career goals.</a:t>
             </a:r>
@@ -1860,7 +1793,6 @@
           <a:solidFill>
             <a:srgbClr val="02C39A"/>
           </a:solidFill>
-          <a:ln/>
         </p:spPr>
       </p:sp>
       <p:sp>
@@ -1878,13 +1810,12 @@
             <a:avLst/>
           </a:prstGeom>
           <a:noFill/>
-          <a:ln/>
-        </p:spPr>
-        <p:txBody>
-          <a:bodyPr wrap="square" rtlCol="0" anchor="ctr"/>
-          <a:lstStyle/>
-          <a:p>
-            <a:pPr indent="0" marL="0">
+        </p:spPr>
+        <p:txBody>
+          <a:bodyPr wrap="square" rtlCol="0" anchor="ctr"/>
+          <a:lstStyle/>
+          <a:p>
+            <a:pPr marL="0" indent="0">
               <a:buNone/>
             </a:pPr>
             <a:r>
@@ -1892,9 +1823,9 @@
                 <a:solidFill>
                   <a:srgbClr val="9FC9C5"/>
                 </a:solidFill>
-                <a:latin typeface="Calibri" pitchFamily="34" charset="0"/>
-                <a:ea typeface="Calibri" pitchFamily="34" charset="-122"/>
-                <a:cs typeface="Calibri" pitchFamily="34" charset="-120"/>
+                <a:latin typeface="Calibri" panose="020F0502020204030204" pitchFamily="34" charset="0"/>
+                <a:ea typeface="Calibri" panose="020F0502020204030204" pitchFamily="34" charset="-122"/>
+                <a:cs typeface="Calibri" panose="020F0502020204030204" pitchFamily="34" charset="-120"/>
               </a:rPr>
               <a:t>Advanced Algorithms Applied to Personalized Academic Guidance</a:t>
             </a:r>
@@ -1917,13 +1848,12 @@
             <a:avLst/>
           </a:prstGeom>
           <a:noFill/>
-          <a:ln/>
-        </p:spPr>
-        <p:txBody>
-          <a:bodyPr wrap="square" rtlCol="0" anchor="ctr"/>
-          <a:lstStyle/>
-          <a:p>
-            <a:pPr algn="r" indent="0" marL="0">
+        </p:spPr>
+        <p:txBody>
+          <a:bodyPr wrap="square" rtlCol="0" anchor="ctr"/>
+          <a:lstStyle/>
+          <a:p>
+            <a:pPr marL="0" indent="0" algn="r">
               <a:buNone/>
             </a:pPr>
             <a:r>
@@ -1931,13 +1861,80 @@
                 <a:solidFill>
                   <a:srgbClr val="5B7A80"/>
                 </a:solidFill>
-                <a:latin typeface="Calibri" pitchFamily="34" charset="0"/>
-                <a:ea typeface="Calibri" pitchFamily="34" charset="-122"/>
-                <a:cs typeface="Calibri" pitchFamily="34" charset="-120"/>
+                <a:latin typeface="Calibri" panose="020F0502020204030204" pitchFamily="34" charset="0"/>
+                <a:ea typeface="Calibri" panose="020F0502020204030204" pitchFamily="34" charset="-122"/>
+                <a:cs typeface="Calibri" panose="020F0502020204030204" pitchFamily="34" charset="-120"/>
               </a:rPr>
               <a:t>01</a:t>
             </a:r>
             <a:endParaRPr lang="en-US" sz="1000" dirty="0"/>
+          </a:p>
+        </p:txBody>
+      </p:sp>
+      <p:sp>
+        <p:nvSpPr>
+          <p:cNvPr id="24" name="Text Box 23"/>
+          <p:cNvSpPr txBox="1"/>
+          <p:nvPr/>
+        </p:nvSpPr>
+        <p:spPr>
+          <a:xfrm>
+            <a:off x="591820" y="5588635"/>
+            <a:ext cx="4015740" cy="922020"/>
+          </a:xfrm>
+          <a:prstGeom prst="rect">
+            <a:avLst/>
+          </a:prstGeom>
+          <a:noFill/>
+        </p:spPr>
+        <p:txBody>
+          <a:bodyPr wrap="square" rtlCol="0">
+            <a:spAutoFit/>
+          </a:bodyPr>
+          <a:p>
+            <a:r>
+              <a:rPr lang="en-US">
+                <a:solidFill>
+                  <a:schemeClr val="bg1"/>
+                </a:solidFill>
+              </a:rPr>
+              <a:t>2520030280 - CH NRIPENDRA</a:t>
+            </a:r>
+            <a:endParaRPr lang="en-US">
+              <a:solidFill>
+                <a:schemeClr val="bg1"/>
+              </a:solidFill>
+            </a:endParaRPr>
+          </a:p>
+          <a:p>
+            <a:r>
+              <a:rPr lang="en-US">
+                <a:solidFill>
+                  <a:schemeClr val="bg1"/>
+                </a:solidFill>
+              </a:rPr>
+              <a:t>2520030164 - M DIJENDRA</a:t>
+            </a:r>
+            <a:endParaRPr lang="en-US">
+              <a:solidFill>
+                <a:schemeClr val="bg1"/>
+              </a:solidFill>
+            </a:endParaRPr>
+          </a:p>
+          <a:p>
+            <a:r>
+              <a:rPr lang="en-US">
+                <a:solidFill>
+                  <a:schemeClr val="bg1"/>
+                </a:solidFill>
+              </a:rPr>
+              <a:t>2520030303 - P BHARGAVA</a:t>
+            </a:r>
+            <a:endParaRPr lang="en-US">
+              <a:solidFill>
+                <a:schemeClr val="bg1"/>
+              </a:solidFill>
+            </a:endParaRPr>
           </a:p>
         </p:txBody>
       </p:sp>
@@ -1951,12 +1948,13 @@
 
 <file path=ppt/slides/slide2.xml><?xml version="1.0" encoding="utf-8"?>
 <p:sld xmlns:a="http://schemas.openxmlformats.org/drawingml/2006/main" xmlns:r="http://schemas.openxmlformats.org/officeDocument/2006/relationships" xmlns:p="http://schemas.openxmlformats.org/presentationml/2006/main">
-  <p:cSld name="Slide 2">
+  <p:cSld>
     <p:bg>
       <p:bgPr>
         <a:solidFill>
           <a:srgbClr val="FFFFFF"/>
         </a:solidFill>
+        <a:effectLst/>
       </p:bgPr>
     </p:bg>
     <p:spTree>
@@ -1988,13 +1986,12 @@
             <a:avLst/>
           </a:prstGeom>
           <a:noFill/>
-          <a:ln/>
-        </p:spPr>
-        <p:txBody>
-          <a:bodyPr wrap="square" rtlCol="0" anchor="ctr"/>
-          <a:lstStyle/>
-          <a:p>
-            <a:pPr indent="0" marL="0">
+        </p:spPr>
+        <p:txBody>
+          <a:bodyPr wrap="square" rtlCol="0" anchor="ctr"/>
+          <a:lstStyle/>
+          <a:p>
+            <a:pPr marL="0" indent="0">
               <a:buNone/>
             </a:pPr>
             <a:r>
@@ -2002,9 +1999,9 @@
                 <a:solidFill>
                   <a:srgbClr val="16323A"/>
                 </a:solidFill>
-                <a:latin typeface="Cambria" pitchFamily="34" charset="0"/>
-                <a:ea typeface="Cambria" pitchFamily="34" charset="-122"/>
-                <a:cs typeface="Cambria" pitchFamily="34" charset="-120"/>
+                <a:latin typeface="Cambria" panose="02040503050406030204" pitchFamily="34" charset="0"/>
+                <a:ea typeface="Cambria" panose="02040503050406030204" pitchFamily="34" charset="-122"/>
+                <a:cs typeface="Cambria" panose="02040503050406030204" pitchFamily="34" charset="-120"/>
               </a:rPr>
               <a:t>Abstract</a:t>
             </a:r>
@@ -2029,7 +2026,6 @@
           <a:solidFill>
             <a:srgbClr val="02C39A"/>
           </a:solidFill>
-          <a:ln/>
         </p:spPr>
       </p:sp>
       <p:sp>
@@ -2047,13 +2043,12 @@
             <a:avLst/>
           </a:prstGeom>
           <a:noFill/>
-          <a:ln/>
         </p:spPr>
         <p:txBody>
           <a:bodyPr wrap="square" rtlCol="0" anchor="t"/>
           <a:lstStyle/>
           <a:p>
-            <a:pPr indent="0" marL="0">
+            <a:pPr marL="0" indent="0">
               <a:lnSpc>
                 <a:spcPct val="135000"/>
               </a:lnSpc>
@@ -2064,16 +2059,16 @@
                 <a:solidFill>
                   <a:srgbClr val="16323A"/>
                 </a:solidFill>
-                <a:latin typeface="Calibri" pitchFamily="34" charset="0"/>
-                <a:ea typeface="Calibri" pitchFamily="34" charset="-122"/>
-                <a:cs typeface="Calibri" pitchFamily="34" charset="-120"/>
+                <a:latin typeface="Calibri" panose="020F0502020204030204" pitchFamily="34" charset="0"/>
+                <a:ea typeface="Calibri" panose="020F0502020204030204" pitchFamily="34" charset="-122"/>
+                <a:cs typeface="Calibri" panose="020F0502020204030204" pitchFamily="34" charset="-120"/>
               </a:rPr>
               <a:t>Choosing the right courses is one of the most consequential — and confusing — decisions a student makes each term. Interests, prerequisite chains, career goals, and credit limits all pull in different directions, and most portals only offer a static, unsearchable list.</a:t>
             </a:r>
             <a:endParaRPr lang="en-US" sz="1450" dirty="0"/>
           </a:p>
           <a:p>
-            <a:pPr indent="0" marL="0">
+            <a:pPr marL="0" indent="0">
               <a:lnSpc>
                 <a:spcPct val="135000"/>
               </a:lnSpc>
@@ -2082,7 +2077,7 @@
             <a:endParaRPr lang="en-US" sz="1450" dirty="0"/>
           </a:p>
           <a:p>
-            <a:pPr indent="0" marL="0">
+            <a:pPr marL="0" indent="0">
               <a:lnSpc>
                 <a:spcPct val="135000"/>
               </a:lnSpc>
@@ -2093,9 +2088,9 @@
                 <a:solidFill>
                   <a:srgbClr val="16323A"/>
                 </a:solidFill>
-                <a:latin typeface="Calibri" pitchFamily="34" charset="0"/>
-                <a:ea typeface="Calibri" pitchFamily="34" charset="-122"/>
-                <a:cs typeface="Calibri" pitchFamily="34" charset="-120"/>
+                <a:latin typeface="Calibri" panose="020F0502020204030204" pitchFamily="34" charset="0"/>
+                <a:ea typeface="Calibri" panose="020F0502020204030204" pitchFamily="34" charset="-122"/>
+                <a:cs typeface="Calibri" panose="020F0502020204030204" pitchFamily="34" charset="-120"/>
               </a:rPr>
               <a:t>The Course Recommendation System treats course discovery as an advanced-algorithms problem: fast text search over course catalogs, similarity-based matching of interests to courses, prerequisite-chain validation, and constrained selection under credit limits — all built from first principles, without relying on prebuilt library data structures.</a:t>
             </a:r>
@@ -2122,9 +2117,8 @@
           <a:solidFill>
             <a:srgbClr val="F2F9F8"/>
           </a:solidFill>
-          <a:ln/>
           <a:effectLst>
-            <a:outerShdw sx="100000" sy="100000" kx="0" ky="0" algn="bl" rotWithShape="0" blurRad="101600" dist="38100" dir="5400000">
+            <a:outerShdw blurRad="101600" dist="38100" dir="5400000" algn="bl" rotWithShape="0">
               <a:srgbClr val="1B2E35">
                 <a:alpha val="18000"/>
               </a:srgbClr>
@@ -2147,13 +2141,12 @@
             <a:avLst/>
           </a:prstGeom>
           <a:noFill/>
-          <a:ln/>
-        </p:spPr>
-        <p:txBody>
-          <a:bodyPr wrap="square" rtlCol="0" anchor="ctr"/>
-          <a:lstStyle/>
-          <a:p>
-            <a:pPr indent="0" marL="0">
+        </p:spPr>
+        <p:txBody>
+          <a:bodyPr wrap="square" rtlCol="0" anchor="ctr"/>
+          <a:lstStyle/>
+          <a:p>
+            <a:pPr marL="0" indent="0">
               <a:buNone/>
             </a:pPr>
             <a:r>
@@ -2161,9 +2154,9 @@
                 <a:solidFill>
                   <a:srgbClr val="028090"/>
                 </a:solidFill>
-                <a:latin typeface="Cambria" pitchFamily="34" charset="0"/>
-                <a:ea typeface="Cambria" pitchFamily="34" charset="-122"/>
-                <a:cs typeface="Cambria" pitchFamily="34" charset="-120"/>
+                <a:latin typeface="Cambria" panose="02040503050406030204" pitchFamily="34" charset="0"/>
+                <a:ea typeface="Cambria" panose="02040503050406030204" pitchFamily="34" charset="-122"/>
+                <a:cs typeface="Cambria" panose="02040503050406030204" pitchFamily="34" charset="-120"/>
               </a:rPr>
               <a:t>6</a:t>
             </a:r>
@@ -2186,13 +2179,12 @@
             <a:avLst/>
           </a:prstGeom>
           <a:noFill/>
-          <a:ln/>
-        </p:spPr>
-        <p:txBody>
-          <a:bodyPr wrap="square" rtlCol="0" anchor="ctr"/>
-          <a:lstStyle/>
-          <a:p>
-            <a:pPr indent="0" marL="0">
+        </p:spPr>
+        <p:txBody>
+          <a:bodyPr wrap="square" rtlCol="0" anchor="ctr"/>
+          <a:lstStyle/>
+          <a:p>
+            <a:pPr marL="0" indent="0">
               <a:lnSpc>
                 <a:spcPct val="115000"/>
               </a:lnSpc>
@@ -2203,9 +2195,9 @@
                 <a:solidFill>
                   <a:srgbClr val="5B7A80"/>
                 </a:solidFill>
-                <a:latin typeface="Calibri" pitchFamily="34" charset="0"/>
-                <a:ea typeface="Calibri" pitchFamily="34" charset="-122"/>
-                <a:cs typeface="Calibri" pitchFamily="34" charset="-120"/>
+                <a:latin typeface="Calibri" panose="020F0502020204030204" pitchFamily="34" charset="0"/>
+                <a:ea typeface="Calibri" panose="020F0502020204030204" pitchFamily="34" charset="-122"/>
+                <a:cs typeface="Calibri" panose="020F0502020204030204" pitchFamily="34" charset="-120"/>
               </a:rPr>
               <a:t>advanced algorithm families applied</a:t>
             </a:r>
@@ -2228,13 +2220,12 @@
             <a:avLst/>
           </a:prstGeom>
           <a:noFill/>
-          <a:ln/>
-        </p:spPr>
-        <p:txBody>
-          <a:bodyPr wrap="square" rtlCol="0" anchor="ctr"/>
-          <a:lstStyle/>
-          <a:p>
-            <a:pPr indent="0" marL="0">
+        </p:spPr>
+        <p:txBody>
+          <a:bodyPr wrap="square" rtlCol="0" anchor="ctr"/>
+          <a:lstStyle/>
+          <a:p>
+            <a:pPr marL="0" indent="0">
               <a:buNone/>
             </a:pPr>
             <a:r>
@@ -2242,9 +2233,9 @@
                 <a:solidFill>
                   <a:srgbClr val="028090"/>
                 </a:solidFill>
-                <a:latin typeface="Cambria" pitchFamily="34" charset="0"/>
-                <a:ea typeface="Cambria" pitchFamily="34" charset="-122"/>
-                <a:cs typeface="Cambria" pitchFamily="34" charset="-120"/>
+                <a:latin typeface="Cambria" panose="02040503050406030204" pitchFamily="34" charset="0"/>
+                <a:ea typeface="Cambria" panose="02040503050406030204" pitchFamily="34" charset="-122"/>
+                <a:cs typeface="Cambria" panose="02040503050406030204" pitchFamily="34" charset="-120"/>
               </a:rPr>
               <a:t>100%</a:t>
             </a:r>
@@ -2267,13 +2258,12 @@
             <a:avLst/>
           </a:prstGeom>
           <a:noFill/>
-          <a:ln/>
-        </p:spPr>
-        <p:txBody>
-          <a:bodyPr wrap="square" rtlCol="0" anchor="ctr"/>
-          <a:lstStyle/>
-          <a:p>
-            <a:pPr indent="0" marL="0">
+        </p:spPr>
+        <p:txBody>
+          <a:bodyPr wrap="square" rtlCol="0" anchor="ctr"/>
+          <a:lstStyle/>
+          <a:p>
+            <a:pPr marL="0" indent="0">
               <a:lnSpc>
                 <a:spcPct val="115000"/>
               </a:lnSpc>
@@ -2284,9 +2274,9 @@
                 <a:solidFill>
                   <a:srgbClr val="5B7A80"/>
                 </a:solidFill>
-                <a:latin typeface="Calibri" pitchFamily="34" charset="0"/>
-                <a:ea typeface="Calibri" pitchFamily="34" charset="-122"/>
-                <a:cs typeface="Calibri" pitchFamily="34" charset="-120"/>
+                <a:latin typeface="Calibri" panose="020F0502020204030204" pitchFamily="34" charset="0"/>
+                <a:ea typeface="Calibri" panose="020F0502020204030204" pitchFamily="34" charset="-122"/>
+                <a:cs typeface="Calibri" panose="020F0502020204030204" pitchFamily="34" charset="-120"/>
               </a:rPr>
               <a:t>custom-built — no built-in collection libraries</a:t>
             </a:r>
@@ -2309,13 +2299,12 @@
             <a:avLst/>
           </a:prstGeom>
           <a:noFill/>
-          <a:ln/>
-        </p:spPr>
-        <p:txBody>
-          <a:bodyPr wrap="square" rtlCol="0" anchor="ctr"/>
-          <a:lstStyle/>
-          <a:p>
-            <a:pPr indent="0" marL="0">
+        </p:spPr>
+        <p:txBody>
+          <a:bodyPr wrap="square" rtlCol="0" anchor="ctr"/>
+          <a:lstStyle/>
+          <a:p>
+            <a:pPr marL="0" indent="0">
               <a:buNone/>
             </a:pPr>
             <a:r>
@@ -2323,9 +2312,9 @@
                 <a:solidFill>
                   <a:srgbClr val="028090"/>
                 </a:solidFill>
-                <a:latin typeface="Cambria" pitchFamily="34" charset="0"/>
-                <a:ea typeface="Cambria" pitchFamily="34" charset="-122"/>
-                <a:cs typeface="Cambria" pitchFamily="34" charset="-120"/>
+                <a:latin typeface="Cambria" panose="02040503050406030204" pitchFamily="34" charset="0"/>
+                <a:ea typeface="Cambria" panose="02040503050406030204" pitchFamily="34" charset="-122"/>
+                <a:cs typeface="Cambria" panose="02040503050406030204" pitchFamily="34" charset="-120"/>
               </a:rPr>
               <a:t>1</a:t>
             </a:r>
@@ -2348,13 +2337,12 @@
             <a:avLst/>
           </a:prstGeom>
           <a:noFill/>
-          <a:ln/>
-        </p:spPr>
-        <p:txBody>
-          <a:bodyPr wrap="square" rtlCol="0" anchor="ctr"/>
-          <a:lstStyle/>
-          <a:p>
-            <a:pPr indent="0" marL="0">
+        </p:spPr>
+        <p:txBody>
+          <a:bodyPr wrap="square" rtlCol="0" anchor="ctr"/>
+          <a:lstStyle/>
+          <a:p>
+            <a:pPr marL="0" indent="0">
               <a:lnSpc>
                 <a:spcPct val="115000"/>
               </a:lnSpc>
@@ -2365,9 +2353,9 @@
                 <a:solidFill>
                   <a:srgbClr val="5B7A80"/>
                 </a:solidFill>
-                <a:latin typeface="Calibri" pitchFamily="34" charset="0"/>
-                <a:ea typeface="Calibri" pitchFamily="34" charset="-122"/>
-                <a:cs typeface="Calibri" pitchFamily="34" charset="-120"/>
+                <a:latin typeface="Calibri" panose="020F0502020204030204" pitchFamily="34" charset="0"/>
+                <a:ea typeface="Calibri" panose="020F0502020204030204" pitchFamily="34" charset="-122"/>
+                <a:cs typeface="Calibri" panose="020F0502020204030204" pitchFamily="34" charset="-120"/>
               </a:rPr>
               <a:t>unified engine: search, match, plan, schedule</a:t>
             </a:r>
@@ -2390,13 +2378,12 @@
             <a:avLst/>
           </a:prstGeom>
           <a:noFill/>
-          <a:ln/>
-        </p:spPr>
-        <p:txBody>
-          <a:bodyPr wrap="square" rtlCol="0" anchor="ctr"/>
-          <a:lstStyle/>
-          <a:p>
-            <a:pPr algn="r" indent="0" marL="0">
+        </p:spPr>
+        <p:txBody>
+          <a:bodyPr wrap="square" rtlCol="0" anchor="ctr"/>
+          <a:lstStyle/>
+          <a:p>
+            <a:pPr marL="0" indent="0" algn="r">
               <a:buNone/>
             </a:pPr>
             <a:r>
@@ -2404,9 +2391,9 @@
                 <a:solidFill>
                   <a:srgbClr val="5B7A80"/>
                 </a:solidFill>
-                <a:latin typeface="Calibri" pitchFamily="34" charset="0"/>
-                <a:ea typeface="Calibri" pitchFamily="34" charset="-122"/>
-                <a:cs typeface="Calibri" pitchFamily="34" charset="-120"/>
+                <a:latin typeface="Calibri" panose="020F0502020204030204" pitchFamily="34" charset="0"/>
+                <a:ea typeface="Calibri" panose="020F0502020204030204" pitchFamily="34" charset="-122"/>
+                <a:cs typeface="Calibri" panose="020F0502020204030204" pitchFamily="34" charset="-120"/>
               </a:rPr>
               <a:t>02</a:t>
             </a:r>
@@ -2424,12 +2411,13 @@
 
 <file path=ppt/slides/slide3.xml><?xml version="1.0" encoding="utf-8"?>
 <p:sld xmlns:a="http://schemas.openxmlformats.org/drawingml/2006/main" xmlns:r="http://schemas.openxmlformats.org/officeDocument/2006/relationships" xmlns:p="http://schemas.openxmlformats.org/presentationml/2006/main">
-  <p:cSld name="Slide 3">
+  <p:cSld>
     <p:bg>
       <p:bgPr>
         <a:solidFill>
           <a:srgbClr val="F2F9F8"/>
         </a:solidFill>
+        <a:effectLst/>
       </p:bgPr>
     </p:bg>
     <p:spTree>
@@ -2461,13 +2449,12 @@
             <a:avLst/>
           </a:prstGeom>
           <a:noFill/>
-          <a:ln/>
-        </p:spPr>
-        <p:txBody>
-          <a:bodyPr wrap="square" rtlCol="0" anchor="ctr"/>
-          <a:lstStyle/>
-          <a:p>
-            <a:pPr indent="0" marL="0">
+        </p:spPr>
+        <p:txBody>
+          <a:bodyPr wrap="square" rtlCol="0" anchor="ctr"/>
+          <a:lstStyle/>
+          <a:p>
+            <a:pPr marL="0" indent="0">
               <a:buNone/>
             </a:pPr>
             <a:r>
@@ -2475,9 +2462,9 @@
                 <a:solidFill>
                   <a:srgbClr val="16323A"/>
                 </a:solidFill>
-                <a:latin typeface="Cambria" pitchFamily="34" charset="0"/>
-                <a:ea typeface="Cambria" pitchFamily="34" charset="-122"/>
-                <a:cs typeface="Cambria" pitchFamily="34" charset="-120"/>
+                <a:latin typeface="Cambria" panose="02040503050406030204" pitchFamily="34" charset="0"/>
+                <a:ea typeface="Cambria" panose="02040503050406030204" pitchFamily="34" charset="-122"/>
+                <a:cs typeface="Cambria" panose="02040503050406030204" pitchFamily="34" charset="-120"/>
               </a:rPr>
               <a:t>Problem Statement</a:t>
             </a:r>
@@ -2502,7 +2489,6 @@
           <a:solidFill>
             <a:srgbClr val="02C39A"/>
           </a:solidFill>
-          <a:ln/>
         </p:spPr>
       </p:sp>
       <p:sp>
@@ -2524,9 +2510,8 @@
           <a:solidFill>
             <a:srgbClr val="FFFFFF"/>
           </a:solidFill>
-          <a:ln/>
           <a:effectLst>
-            <a:outerShdw sx="100000" sy="100000" kx="0" ky="0" algn="bl" rotWithShape="0" blurRad="76200" dist="25400" dir="5400000">
+            <a:outerShdw blurRad="76200" dist="25400" dir="5400000" algn="bl" rotWithShape="0">
               <a:srgbClr val="1B2E35">
                 <a:alpha val="12000"/>
               </a:srgbClr>
@@ -2551,7 +2536,6 @@
           <a:solidFill>
             <a:srgbClr val="028090"/>
           </a:solidFill>
-          <a:ln/>
         </p:spPr>
       </p:sp>
       <p:sp>
@@ -2569,13 +2553,12 @@
             <a:avLst/>
           </a:prstGeom>
           <a:noFill/>
-          <a:ln/>
-        </p:spPr>
-        <p:txBody>
-          <a:bodyPr wrap="square" rtlCol="0" anchor="ctr"/>
-          <a:lstStyle/>
-          <a:p>
-            <a:pPr algn="ctr" indent="0" marL="0">
+        </p:spPr>
+        <p:txBody>
+          <a:bodyPr wrap="square" rtlCol="0" anchor="ctr"/>
+          <a:lstStyle/>
+          <a:p>
+            <a:pPr marL="0" indent="0" algn="ctr">
               <a:buNone/>
             </a:pPr>
             <a:r>
@@ -2583,9 +2566,9 @@
                 <a:solidFill>
                   <a:srgbClr val="FFFFFF"/>
                 </a:solidFill>
-                <a:latin typeface="Calibri" pitchFamily="34" charset="0"/>
-                <a:ea typeface="Calibri" pitchFamily="34" charset="-122"/>
-                <a:cs typeface="Calibri" pitchFamily="34" charset="-120"/>
+                <a:latin typeface="Calibri" panose="020F0502020204030204" pitchFamily="34" charset="0"/>
+                <a:ea typeface="Calibri" panose="020F0502020204030204" pitchFamily="34" charset="-122"/>
+                <a:cs typeface="Calibri" panose="020F0502020204030204" pitchFamily="34" charset="-120"/>
               </a:rPr>
               <a:t>1</a:t>
             </a:r>
@@ -2608,13 +2591,12 @@
             <a:avLst/>
           </a:prstGeom>
           <a:noFill/>
-          <a:ln/>
-        </p:spPr>
-        <p:txBody>
-          <a:bodyPr wrap="square" rtlCol="0" anchor="ctr"/>
-          <a:lstStyle/>
-          <a:p>
-            <a:pPr indent="0" marL="0">
+        </p:spPr>
+        <p:txBody>
+          <a:bodyPr wrap="square" rtlCol="0" anchor="ctr"/>
+          <a:lstStyle/>
+          <a:p>
+            <a:pPr marL="0" indent="0">
               <a:buNone/>
             </a:pPr>
             <a:r>
@@ -2622,9 +2604,9 @@
                 <a:solidFill>
                   <a:srgbClr val="16323A"/>
                 </a:solidFill>
-                <a:latin typeface="Cambria" pitchFamily="34" charset="0"/>
-                <a:ea typeface="Cambria" pitchFamily="34" charset="-122"/>
-                <a:cs typeface="Cambria" pitchFamily="34" charset="-120"/>
+                <a:latin typeface="Cambria" panose="02040503050406030204" pitchFamily="34" charset="0"/>
+                <a:ea typeface="Cambria" panose="02040503050406030204" pitchFamily="34" charset="-122"/>
+                <a:cs typeface="Cambria" panose="02040503050406030204" pitchFamily="34" charset="-120"/>
               </a:rPr>
               <a:t>Fragmented discovery</a:t>
             </a:r>
@@ -2647,13 +2629,12 @@
             <a:avLst/>
           </a:prstGeom>
           <a:noFill/>
-          <a:ln/>
-        </p:spPr>
-        <p:txBody>
-          <a:bodyPr wrap="square" rtlCol="0" anchor="ctr"/>
-          <a:lstStyle/>
-          <a:p>
-            <a:pPr indent="0" marL="0">
+        </p:spPr>
+        <p:txBody>
+          <a:bodyPr wrap="square" rtlCol="0" anchor="ctr"/>
+          <a:lstStyle/>
+          <a:p>
+            <a:pPr marL="0" indent="0">
               <a:lnSpc>
                 <a:spcPct val="125000"/>
               </a:lnSpc>
@@ -2664,9 +2645,9 @@
                 <a:solidFill>
                   <a:srgbClr val="5B7A80"/>
                 </a:solidFill>
-                <a:latin typeface="Calibri" pitchFamily="34" charset="0"/>
-                <a:ea typeface="Calibri" pitchFamily="34" charset="-122"/>
-                <a:cs typeface="Calibri" pitchFamily="34" charset="-120"/>
+                <a:latin typeface="Calibri" panose="020F0502020204030204" pitchFamily="34" charset="0"/>
+                <a:ea typeface="Calibri" panose="020F0502020204030204" pitchFamily="34" charset="-122"/>
+                <a:cs typeface="Calibri" panose="020F0502020204030204" pitchFamily="34" charset="-120"/>
               </a:rPr>
               <a:t>Students search course catalogs by exact name only — a small typo or unfamiliar term returns nothing useful.</a:t>
             </a:r>
@@ -2693,9 +2674,8 @@
           <a:solidFill>
             <a:srgbClr val="FFFFFF"/>
           </a:solidFill>
-          <a:ln/>
           <a:effectLst>
-            <a:outerShdw sx="100000" sy="100000" kx="0" ky="0" algn="bl" rotWithShape="0" blurRad="76200" dist="25400" dir="5400000">
+            <a:outerShdw blurRad="76200" dist="25400" dir="5400000" algn="bl" rotWithShape="0">
               <a:srgbClr val="1B2E35">
                 <a:alpha val="12000"/>
               </a:srgbClr>
@@ -2720,7 +2700,6 @@
           <a:solidFill>
             <a:srgbClr val="028090"/>
           </a:solidFill>
-          <a:ln/>
         </p:spPr>
       </p:sp>
       <p:sp>
@@ -2738,13 +2717,12 @@
             <a:avLst/>
           </a:prstGeom>
           <a:noFill/>
-          <a:ln/>
-        </p:spPr>
-        <p:txBody>
-          <a:bodyPr wrap="square" rtlCol="0" anchor="ctr"/>
-          <a:lstStyle/>
-          <a:p>
-            <a:pPr algn="ctr" indent="0" marL="0">
+        </p:spPr>
+        <p:txBody>
+          <a:bodyPr wrap="square" rtlCol="0" anchor="ctr"/>
+          <a:lstStyle/>
+          <a:p>
+            <a:pPr marL="0" indent="0" algn="ctr">
               <a:buNone/>
             </a:pPr>
             <a:r>
@@ -2752,9 +2730,9 @@
                 <a:solidFill>
                   <a:srgbClr val="FFFFFF"/>
                 </a:solidFill>
-                <a:latin typeface="Calibri" pitchFamily="34" charset="0"/>
-                <a:ea typeface="Calibri" pitchFamily="34" charset="-122"/>
-                <a:cs typeface="Calibri" pitchFamily="34" charset="-120"/>
+                <a:latin typeface="Calibri" panose="020F0502020204030204" pitchFamily="34" charset="0"/>
+                <a:ea typeface="Calibri" panose="020F0502020204030204" pitchFamily="34" charset="-122"/>
+                <a:cs typeface="Calibri" panose="020F0502020204030204" pitchFamily="34" charset="-120"/>
               </a:rPr>
               <a:t>2</a:t>
             </a:r>
@@ -2777,13 +2755,12 @@
             <a:avLst/>
           </a:prstGeom>
           <a:noFill/>
-          <a:ln/>
-        </p:spPr>
-        <p:txBody>
-          <a:bodyPr wrap="square" rtlCol="0" anchor="ctr"/>
-          <a:lstStyle/>
-          <a:p>
-            <a:pPr indent="0" marL="0">
+        </p:spPr>
+        <p:txBody>
+          <a:bodyPr wrap="square" rtlCol="0" anchor="ctr"/>
+          <a:lstStyle/>
+          <a:p>
+            <a:pPr marL="0" indent="0">
               <a:buNone/>
             </a:pPr>
             <a:r>
@@ -2791,9 +2768,9 @@
                 <a:solidFill>
                   <a:srgbClr val="16323A"/>
                 </a:solidFill>
-                <a:latin typeface="Cambria" pitchFamily="34" charset="0"/>
-                <a:ea typeface="Cambria" pitchFamily="34" charset="-122"/>
-                <a:cs typeface="Cambria" pitchFamily="34" charset="-120"/>
+                <a:latin typeface="Cambria" panose="02040503050406030204" pitchFamily="34" charset="0"/>
+                <a:ea typeface="Cambria" panose="02040503050406030204" pitchFamily="34" charset="-122"/>
+                <a:cs typeface="Cambria" panose="02040503050406030204" pitchFamily="34" charset="-120"/>
               </a:rPr>
               <a:t>Invisible prerequisites</a:t>
             </a:r>
@@ -2816,13 +2793,12 @@
             <a:avLst/>
           </a:prstGeom>
           <a:noFill/>
-          <a:ln/>
-        </p:spPr>
-        <p:txBody>
-          <a:bodyPr wrap="square" rtlCol="0" anchor="ctr"/>
-          <a:lstStyle/>
-          <a:p>
-            <a:pPr indent="0" marL="0">
+        </p:spPr>
+        <p:txBody>
+          <a:bodyPr wrap="square" rtlCol="0" anchor="ctr"/>
+          <a:lstStyle/>
+          <a:p>
+            <a:pPr marL="0" indent="0">
               <a:lnSpc>
                 <a:spcPct val="125000"/>
               </a:lnSpc>
@@ -2833,9 +2809,9 @@
                 <a:solidFill>
                   <a:srgbClr val="5B7A80"/>
                 </a:solidFill>
-                <a:latin typeface="Calibri" pitchFamily="34" charset="0"/>
-                <a:ea typeface="Calibri" pitchFamily="34" charset="-122"/>
-                <a:cs typeface="Calibri" pitchFamily="34" charset="-120"/>
+                <a:latin typeface="Calibri" panose="020F0502020204030204" pitchFamily="34" charset="0"/>
+                <a:ea typeface="Calibri" panose="020F0502020204030204" pitchFamily="34" charset="-122"/>
+                <a:cs typeface="Calibri" panose="020F0502020204030204" pitchFamily="34" charset="-120"/>
               </a:rPr>
               <a:t>Prerequisite chains across semesters are rarely checked automatically, causing students to enroll in courses they aren't yet eligible for.</a:t>
             </a:r>
@@ -2862,9 +2838,8 @@
           <a:solidFill>
             <a:srgbClr val="FFFFFF"/>
           </a:solidFill>
-          <a:ln/>
           <a:effectLst>
-            <a:outerShdw sx="100000" sy="100000" kx="0" ky="0" algn="bl" rotWithShape="0" blurRad="76200" dist="25400" dir="5400000">
+            <a:outerShdw blurRad="76200" dist="25400" dir="5400000" algn="bl" rotWithShape="0">
               <a:srgbClr val="1B2E35">
                 <a:alpha val="12000"/>
               </a:srgbClr>
@@ -2889,7 +2864,6 @@
           <a:solidFill>
             <a:srgbClr val="028090"/>
           </a:solidFill>
-          <a:ln/>
         </p:spPr>
       </p:sp>
       <p:sp>
@@ -2907,13 +2881,12 @@
             <a:avLst/>
           </a:prstGeom>
           <a:noFill/>
-          <a:ln/>
-        </p:spPr>
-        <p:txBody>
-          <a:bodyPr wrap="square" rtlCol="0" anchor="ctr"/>
-          <a:lstStyle/>
-          <a:p>
-            <a:pPr algn="ctr" indent="0" marL="0">
+        </p:spPr>
+        <p:txBody>
+          <a:bodyPr wrap="square" rtlCol="0" anchor="ctr"/>
+          <a:lstStyle/>
+          <a:p>
+            <a:pPr marL="0" indent="0" algn="ctr">
               <a:buNone/>
             </a:pPr>
             <a:r>
@@ -2921,9 +2894,9 @@
                 <a:solidFill>
                   <a:srgbClr val="FFFFFF"/>
                 </a:solidFill>
-                <a:latin typeface="Calibri" pitchFamily="34" charset="0"/>
-                <a:ea typeface="Calibri" pitchFamily="34" charset="-122"/>
-                <a:cs typeface="Calibri" pitchFamily="34" charset="-120"/>
+                <a:latin typeface="Calibri" panose="020F0502020204030204" pitchFamily="34" charset="0"/>
+                <a:ea typeface="Calibri" panose="020F0502020204030204" pitchFamily="34" charset="-122"/>
+                <a:cs typeface="Calibri" panose="020F0502020204030204" pitchFamily="34" charset="-120"/>
               </a:rPr>
               <a:t>3</a:t>
             </a:r>
@@ -2946,13 +2919,12 @@
             <a:avLst/>
           </a:prstGeom>
           <a:noFill/>
-          <a:ln/>
-        </p:spPr>
-        <p:txBody>
-          <a:bodyPr wrap="square" rtlCol="0" anchor="ctr"/>
-          <a:lstStyle/>
-          <a:p>
-            <a:pPr indent="0" marL="0">
+        </p:spPr>
+        <p:txBody>
+          <a:bodyPr wrap="square" rtlCol="0" anchor="ctr"/>
+          <a:lstStyle/>
+          <a:p>
+            <a:pPr marL="0" indent="0">
               <a:buNone/>
             </a:pPr>
             <a:r>
@@ -2960,9 +2932,9 @@
                 <a:solidFill>
                   <a:srgbClr val="16323A"/>
                 </a:solidFill>
-                <a:latin typeface="Cambria" pitchFamily="34" charset="0"/>
-                <a:ea typeface="Cambria" pitchFamily="34" charset="-122"/>
-                <a:cs typeface="Cambria" pitchFamily="34" charset="-120"/>
+                <a:latin typeface="Cambria" panose="02040503050406030204" pitchFamily="34" charset="0"/>
+                <a:ea typeface="Cambria" panose="02040503050406030204" pitchFamily="34" charset="-122"/>
+                <a:cs typeface="Cambria" panose="02040503050406030204" pitchFamily="34" charset="-120"/>
               </a:rPr>
               <a:t>No true “fit” signal</a:t>
             </a:r>
@@ -2985,13 +2957,12 @@
             <a:avLst/>
           </a:prstGeom>
           <a:noFill/>
-          <a:ln/>
-        </p:spPr>
-        <p:txBody>
-          <a:bodyPr wrap="square" rtlCol="0" anchor="ctr"/>
-          <a:lstStyle/>
-          <a:p>
-            <a:pPr indent="0" marL="0">
+        </p:spPr>
+        <p:txBody>
+          <a:bodyPr wrap="square" rtlCol="0" anchor="ctr"/>
+          <a:lstStyle/>
+          <a:p>
+            <a:pPr marL="0" indent="0">
               <a:lnSpc>
                 <a:spcPct val="125000"/>
               </a:lnSpc>
@@ -3002,9 +2973,9 @@
                 <a:solidFill>
                   <a:srgbClr val="5B7A80"/>
                 </a:solidFill>
-                <a:latin typeface="Calibri" pitchFamily="34" charset="0"/>
-                <a:ea typeface="Calibri" pitchFamily="34" charset="-122"/>
-                <a:cs typeface="Calibri" pitchFamily="34" charset="-120"/>
+                <a:latin typeface="Calibri" panose="020F0502020204030204" pitchFamily="34" charset="0"/>
+                <a:ea typeface="Calibri" panose="020F0502020204030204" pitchFamily="34" charset="-122"/>
+                <a:cs typeface="Calibri" panose="020F0502020204030204" pitchFamily="34" charset="-120"/>
               </a:rPr>
               <a:t>Existing portals cannot measure how closely a course actually matches a student's stated interests or past coursework.</a:t>
             </a:r>
@@ -3031,9 +3002,8 @@
           <a:solidFill>
             <a:srgbClr val="FFFFFF"/>
           </a:solidFill>
-          <a:ln/>
           <a:effectLst>
-            <a:outerShdw sx="100000" sy="100000" kx="0" ky="0" algn="bl" rotWithShape="0" blurRad="76200" dist="25400" dir="5400000">
+            <a:outerShdw blurRad="76200" dist="25400" dir="5400000" algn="bl" rotWithShape="0">
               <a:srgbClr val="1B2E35">
                 <a:alpha val="12000"/>
               </a:srgbClr>
@@ -3058,7 +3028,6 @@
           <a:solidFill>
             <a:srgbClr val="028090"/>
           </a:solidFill>
-          <a:ln/>
         </p:spPr>
       </p:sp>
       <p:sp>
@@ -3076,13 +3045,12 @@
             <a:avLst/>
           </a:prstGeom>
           <a:noFill/>
-          <a:ln/>
-        </p:spPr>
-        <p:txBody>
-          <a:bodyPr wrap="square" rtlCol="0" anchor="ctr"/>
-          <a:lstStyle/>
-          <a:p>
-            <a:pPr algn="ctr" indent="0" marL="0">
+        </p:spPr>
+        <p:txBody>
+          <a:bodyPr wrap="square" rtlCol="0" anchor="ctr"/>
+          <a:lstStyle/>
+          <a:p>
+            <a:pPr marL="0" indent="0" algn="ctr">
               <a:buNone/>
             </a:pPr>
             <a:r>
@@ -3090,9 +3058,9 @@
                 <a:solidFill>
                   <a:srgbClr val="FFFFFF"/>
                 </a:solidFill>
-                <a:latin typeface="Calibri" pitchFamily="34" charset="0"/>
-                <a:ea typeface="Calibri" pitchFamily="34" charset="-122"/>
-                <a:cs typeface="Calibri" pitchFamily="34" charset="-120"/>
+                <a:latin typeface="Calibri" panose="020F0502020204030204" pitchFamily="34" charset="0"/>
+                <a:ea typeface="Calibri" panose="020F0502020204030204" pitchFamily="34" charset="-122"/>
+                <a:cs typeface="Calibri" panose="020F0502020204030204" pitchFamily="34" charset="-120"/>
               </a:rPr>
               <a:t>4</a:t>
             </a:r>
@@ -3115,13 +3083,12 @@
             <a:avLst/>
           </a:prstGeom>
           <a:noFill/>
-          <a:ln/>
-        </p:spPr>
-        <p:txBody>
-          <a:bodyPr wrap="square" rtlCol="0" anchor="ctr"/>
-          <a:lstStyle/>
-          <a:p>
-            <a:pPr indent="0" marL="0">
+        </p:spPr>
+        <p:txBody>
+          <a:bodyPr wrap="square" rtlCol="0" anchor="ctr"/>
+          <a:lstStyle/>
+          <a:p>
+            <a:pPr marL="0" indent="0">
               <a:buNone/>
             </a:pPr>
             <a:r>
@@ -3129,9 +3096,9 @@
                 <a:solidFill>
                   <a:srgbClr val="16323A"/>
                 </a:solidFill>
-                <a:latin typeface="Cambria" pitchFamily="34" charset="0"/>
-                <a:ea typeface="Cambria" pitchFamily="34" charset="-122"/>
-                <a:cs typeface="Cambria" pitchFamily="34" charset="-120"/>
+                <a:latin typeface="Cambria" panose="02040503050406030204" pitchFamily="34" charset="0"/>
+                <a:ea typeface="Cambria" panose="02040503050406030204" pitchFamily="34" charset="-122"/>
+                <a:cs typeface="Cambria" panose="02040503050406030204" pitchFamily="34" charset="-120"/>
               </a:rPr>
               <a:t>Credit-constrained planning</a:t>
             </a:r>
@@ -3154,13 +3121,12 @@
             <a:avLst/>
           </a:prstGeom>
           <a:noFill/>
-          <a:ln/>
-        </p:spPr>
-        <p:txBody>
-          <a:bodyPr wrap="square" rtlCol="0" anchor="ctr"/>
-          <a:lstStyle/>
-          <a:p>
-            <a:pPr indent="0" marL="0">
+        </p:spPr>
+        <p:txBody>
+          <a:bodyPr wrap="square" rtlCol="0" anchor="ctr"/>
+          <a:lstStyle/>
+          <a:p>
+            <a:pPr marL="0" indent="0">
               <a:lnSpc>
                 <a:spcPct val="125000"/>
               </a:lnSpc>
@@ -3171,9 +3137,9 @@
                 <a:solidFill>
                   <a:srgbClr val="5B7A80"/>
                 </a:solidFill>
-                <a:latin typeface="Calibri" pitchFamily="34" charset="0"/>
-                <a:ea typeface="Calibri" pitchFamily="34" charset="-122"/>
-                <a:cs typeface="Calibri" pitchFamily="34" charset="-120"/>
+                <a:latin typeface="Calibri" panose="020F0502020204030204" pitchFamily="34" charset="0"/>
+                <a:ea typeface="Calibri" panose="020F0502020204030204" pitchFamily="34" charset="-122"/>
+                <a:cs typeface="Calibri" panose="020F0502020204030204" pitchFamily="34" charset="-120"/>
               </a:rPr>
               <a:t>Picking the best combination of courses within a fixed credit/time budget is a combinatorial optimization problem, not a simple filter.</a:t>
             </a:r>
@@ -3196,13 +3162,12 @@
             <a:avLst/>
           </a:prstGeom>
           <a:noFill/>
-          <a:ln/>
-        </p:spPr>
-        <p:txBody>
-          <a:bodyPr wrap="square" rtlCol="0" anchor="ctr"/>
-          <a:lstStyle/>
-          <a:p>
-            <a:pPr algn="r" indent="0" marL="0">
+        </p:spPr>
+        <p:txBody>
+          <a:bodyPr wrap="square" rtlCol="0" anchor="ctr"/>
+          <a:lstStyle/>
+          <a:p>
+            <a:pPr marL="0" indent="0" algn="r">
               <a:buNone/>
             </a:pPr>
             <a:r>
@@ -3210,9 +3175,9 @@
                 <a:solidFill>
                   <a:srgbClr val="5B7A80"/>
                 </a:solidFill>
-                <a:latin typeface="Calibri" pitchFamily="34" charset="0"/>
-                <a:ea typeface="Calibri" pitchFamily="34" charset="-122"/>
-                <a:cs typeface="Calibri" pitchFamily="34" charset="-120"/>
+                <a:latin typeface="Calibri" panose="020F0502020204030204" pitchFamily="34" charset="0"/>
+                <a:ea typeface="Calibri" panose="020F0502020204030204" pitchFamily="34" charset="-122"/>
+                <a:cs typeface="Calibri" panose="020F0502020204030204" pitchFamily="34" charset="-120"/>
               </a:rPr>
               <a:t>03</a:t>
             </a:r>
@@ -3230,12 +3195,13 @@
 
 <file path=ppt/slides/slide4.xml><?xml version="1.0" encoding="utf-8"?>
 <p:sld xmlns:a="http://schemas.openxmlformats.org/drawingml/2006/main" xmlns:r="http://schemas.openxmlformats.org/officeDocument/2006/relationships" xmlns:p="http://schemas.openxmlformats.org/presentationml/2006/main">
-  <p:cSld name="Slide 4">
+  <p:cSld>
     <p:bg>
       <p:bgPr>
         <a:solidFill>
           <a:srgbClr val="FFFFFF"/>
         </a:solidFill>
+        <a:effectLst/>
       </p:bgPr>
     </p:bg>
     <p:spTree>
@@ -3267,13 +3233,12 @@
             <a:avLst/>
           </a:prstGeom>
           <a:noFill/>
-          <a:ln/>
-        </p:spPr>
-        <p:txBody>
-          <a:bodyPr wrap="square" rtlCol="0" anchor="ctr"/>
-          <a:lstStyle/>
-          <a:p>
-            <a:pPr indent="0" marL="0">
+        </p:spPr>
+        <p:txBody>
+          <a:bodyPr wrap="square" rtlCol="0" anchor="ctr"/>
+          <a:lstStyle/>
+          <a:p>
+            <a:pPr marL="0" indent="0">
               <a:buNone/>
             </a:pPr>
             <a:r>
@@ -3281,9 +3246,9 @@
                 <a:solidFill>
                   <a:srgbClr val="16323A"/>
                 </a:solidFill>
-                <a:latin typeface="Cambria" pitchFamily="34" charset="0"/>
-                <a:ea typeface="Cambria" pitchFamily="34" charset="-122"/>
-                <a:cs typeface="Cambria" pitchFamily="34" charset="-120"/>
+                <a:latin typeface="Cambria" panose="02040503050406030204" pitchFamily="34" charset="0"/>
+                <a:ea typeface="Cambria" panose="02040503050406030204" pitchFamily="34" charset="-122"/>
+                <a:cs typeface="Cambria" panose="02040503050406030204" pitchFamily="34" charset="-120"/>
               </a:rPr>
               <a:t>Proposed Functionalities</a:t>
             </a:r>
@@ -3306,13 +3271,12 @@
             <a:avLst/>
           </a:prstGeom>
           <a:noFill/>
-          <a:ln/>
-        </p:spPr>
-        <p:txBody>
-          <a:bodyPr wrap="square" rtlCol="0" anchor="ctr"/>
-          <a:lstStyle/>
-          <a:p>
-            <a:pPr indent="0" marL="0">
+        </p:spPr>
+        <p:txBody>
+          <a:bodyPr wrap="square" rtlCol="0" anchor="ctr"/>
+          <a:lstStyle/>
+          <a:p>
+            <a:pPr marL="0" indent="0">
               <a:buNone/>
             </a:pPr>
             <a:r>
@@ -3320,9 +3284,9 @@
                 <a:solidFill>
                   <a:srgbClr val="5B7A80"/>
                 </a:solidFill>
-                <a:latin typeface="Calibri" pitchFamily="34" charset="0"/>
-                <a:ea typeface="Calibri" pitchFamily="34" charset="-122"/>
-                <a:cs typeface="Calibri" pitchFamily="34" charset="-120"/>
+                <a:latin typeface="Calibri" panose="020F0502020204030204" pitchFamily="34" charset="0"/>
+                <a:ea typeface="Calibri" panose="020F0502020204030204" pitchFamily="34" charset="-122"/>
+                <a:cs typeface="Calibri" panose="020F0502020204030204" pitchFamily="34" charset="-120"/>
               </a:rPr>
               <a:t>Each student query is answered by the advanced-algorithm family best suited to it</a:t>
             </a:r>
@@ -3349,7 +3313,6 @@
           <a:solidFill>
             <a:srgbClr val="F2F9F8"/>
           </a:solidFill>
-          <a:ln/>
         </p:spPr>
       </p:sp>
       <p:sp>
@@ -3369,7 +3332,6 @@
           <a:solidFill>
             <a:srgbClr val="00A896"/>
           </a:solidFill>
-          <a:ln/>
         </p:spPr>
       </p:sp>
       <p:sp>
@@ -3389,7 +3351,6 @@
           <a:solidFill>
             <a:srgbClr val="028090"/>
           </a:solidFill>
-          <a:ln/>
         </p:spPr>
       </p:sp>
       <p:sp>
@@ -3407,13 +3368,12 @@
             <a:avLst/>
           </a:prstGeom>
           <a:noFill/>
-          <a:ln/>
-        </p:spPr>
-        <p:txBody>
-          <a:bodyPr wrap="square" rtlCol="0" anchor="ctr"/>
-          <a:lstStyle/>
-          <a:p>
-            <a:pPr algn="ctr" indent="0" marL="0">
+        </p:spPr>
+        <p:txBody>
+          <a:bodyPr wrap="square" rtlCol="0" anchor="ctr"/>
+          <a:lstStyle/>
+          <a:p>
+            <a:pPr marL="0" indent="0" algn="ctr">
               <a:buNone/>
             </a:pPr>
             <a:r>
@@ -3421,9 +3381,9 @@
                 <a:solidFill>
                   <a:srgbClr val="FFFFFF"/>
                 </a:solidFill>
-                <a:latin typeface="Calibri" pitchFamily="34" charset="0"/>
-                <a:ea typeface="Calibri" pitchFamily="34" charset="-122"/>
-                <a:cs typeface="Calibri" pitchFamily="34" charset="-120"/>
+                <a:latin typeface="Calibri" panose="020F0502020204030204" pitchFamily="34" charset="0"/>
+                <a:ea typeface="Calibri" panose="020F0502020204030204" pitchFamily="34" charset="-122"/>
+                <a:cs typeface="Calibri" panose="020F0502020204030204" pitchFamily="34" charset="-120"/>
               </a:rPr>
               <a:t>Aa</a:t>
             </a:r>
@@ -3446,13 +3406,12 @@
             <a:avLst/>
           </a:prstGeom>
           <a:noFill/>
-          <a:ln/>
-        </p:spPr>
-        <p:txBody>
-          <a:bodyPr wrap="square" rtlCol="0" anchor="ctr"/>
-          <a:lstStyle/>
-          <a:p>
-            <a:pPr indent="0" marL="0">
+        </p:spPr>
+        <p:txBody>
+          <a:bodyPr wrap="square" rtlCol="0" anchor="ctr"/>
+          <a:lstStyle/>
+          <a:p>
+            <a:pPr marL="0" indent="0">
               <a:buNone/>
             </a:pPr>
             <a:r>
@@ -3460,9 +3419,9 @@
                 <a:solidFill>
                   <a:srgbClr val="16323A"/>
                 </a:solidFill>
-                <a:latin typeface="Cambria" pitchFamily="34" charset="0"/>
-                <a:ea typeface="Cambria" pitchFamily="34" charset="-122"/>
-                <a:cs typeface="Cambria" pitchFamily="34" charset="-120"/>
+                <a:latin typeface="Cambria" panose="02040503050406030204" pitchFamily="34" charset="0"/>
+                <a:ea typeface="Cambria" panose="02040503050406030204" pitchFamily="34" charset="-122"/>
+                <a:cs typeface="Cambria" panose="02040503050406030204" pitchFamily="34" charset="-120"/>
               </a:rPr>
               <a:t>Keyword &amp; Fuzzy Search</a:t>
             </a:r>
@@ -3485,13 +3444,12 @@
             <a:avLst/>
           </a:prstGeom>
           <a:noFill/>
-          <a:ln/>
-        </p:spPr>
-        <p:txBody>
-          <a:bodyPr wrap="square" rtlCol="0" anchor="ctr"/>
-          <a:lstStyle/>
-          <a:p>
-            <a:pPr indent="0" marL="0">
+        </p:spPr>
+        <p:txBody>
+          <a:bodyPr wrap="square" rtlCol="0" anchor="ctr"/>
+          <a:lstStyle/>
+          <a:p>
+            <a:pPr marL="0" indent="0">
               <a:lnSpc>
                 <a:spcPct val="120000"/>
               </a:lnSpc>
@@ -3502,9 +3460,9 @@
                 <a:solidFill>
                   <a:srgbClr val="5B7A80"/>
                 </a:solidFill>
-                <a:latin typeface="Calibri" pitchFamily="34" charset="0"/>
-                <a:ea typeface="Calibri" pitchFamily="34" charset="-122"/>
-                <a:cs typeface="Calibri" pitchFamily="34" charset="-120"/>
+                <a:latin typeface="Calibri" panose="020F0502020204030204" pitchFamily="34" charset="0"/>
+                <a:ea typeface="Calibri" panose="020F0502020204030204" pitchFamily="34" charset="-122"/>
+                <a:cs typeface="Calibri" panose="020F0502020204030204" pitchFamily="34" charset="-120"/>
               </a:rPr>
               <a:t>KMP, Rabin-Karp and Edit-Distance (Wagner-Fischer) locate courses instantly and tolerate misspelled queries.</a:t>
             </a:r>
@@ -3531,7 +3489,6 @@
           <a:solidFill>
             <a:srgbClr val="F2F9F8"/>
           </a:solidFill>
-          <a:ln/>
         </p:spPr>
       </p:sp>
       <p:sp>
@@ -3551,7 +3508,6 @@
           <a:solidFill>
             <a:srgbClr val="00A896"/>
           </a:solidFill>
-          <a:ln/>
         </p:spPr>
       </p:sp>
       <p:sp>
@@ -3571,7 +3527,6 @@
           <a:solidFill>
             <a:srgbClr val="028090"/>
           </a:solidFill>
-          <a:ln/>
         </p:spPr>
       </p:sp>
       <p:sp>
@@ -3589,13 +3544,12 @@
             <a:avLst/>
           </a:prstGeom>
           <a:noFill/>
-          <a:ln/>
-        </p:spPr>
-        <p:txBody>
-          <a:bodyPr wrap="square" rtlCol="0" anchor="ctr"/>
-          <a:lstStyle/>
-          <a:p>
-            <a:pPr algn="ctr" indent="0" marL="0">
+        </p:spPr>
+        <p:txBody>
+          <a:bodyPr wrap="square" rtlCol="0" anchor="ctr"/>
+          <a:lstStyle/>
+          <a:p>
+            <a:pPr marL="0" indent="0" algn="ctr">
               <a:buNone/>
             </a:pPr>
             <a:r>
@@ -3603,9 +3557,9 @@
                 <a:solidFill>
                   <a:srgbClr val="FFFFFF"/>
                 </a:solidFill>
-                <a:latin typeface="Calibri" pitchFamily="34" charset="0"/>
-                <a:ea typeface="Calibri" pitchFamily="34" charset="-122"/>
-                <a:cs typeface="Calibri" pitchFamily="34" charset="-120"/>
+                <a:latin typeface="Calibri" panose="020F0502020204030204" pitchFamily="34" charset="0"/>
+                <a:ea typeface="Calibri" panose="020F0502020204030204" pitchFamily="34" charset="-122"/>
+                <a:cs typeface="Calibri" panose="020F0502020204030204" pitchFamily="34" charset="-120"/>
               </a:rPr>
               <a:t>~</a:t>
             </a:r>
@@ -3628,13 +3582,12 @@
             <a:avLst/>
           </a:prstGeom>
           <a:noFill/>
-          <a:ln/>
-        </p:spPr>
-        <p:txBody>
-          <a:bodyPr wrap="square" rtlCol="0" anchor="ctr"/>
-          <a:lstStyle/>
-          <a:p>
-            <a:pPr indent="0" marL="0">
+        </p:spPr>
+        <p:txBody>
+          <a:bodyPr wrap="square" rtlCol="0" anchor="ctr"/>
+          <a:lstStyle/>
+          <a:p>
+            <a:pPr marL="0" indent="0">
               <a:buNone/>
             </a:pPr>
             <a:r>
@@ -3642,9 +3595,9 @@
                 <a:solidFill>
                   <a:srgbClr val="16323A"/>
                 </a:solidFill>
-                <a:latin typeface="Cambria" pitchFamily="34" charset="0"/>
-                <a:ea typeface="Cambria" pitchFamily="34" charset="-122"/>
-                <a:cs typeface="Cambria" pitchFamily="34" charset="-120"/>
+                <a:latin typeface="Cambria" panose="02040503050406030204" pitchFamily="34" charset="0"/>
+                <a:ea typeface="Cambria" panose="02040503050406030204" pitchFamily="34" charset="-122"/>
+                <a:cs typeface="Cambria" panose="02040503050406030204" pitchFamily="34" charset="-120"/>
               </a:rPr>
               <a:t>Interest-Based Similarity</a:t>
             </a:r>
@@ -3667,13 +3620,12 @@
             <a:avLst/>
           </a:prstGeom>
           <a:noFill/>
-          <a:ln/>
-        </p:spPr>
-        <p:txBody>
-          <a:bodyPr wrap="square" rtlCol="0" anchor="ctr"/>
-          <a:lstStyle/>
-          <a:p>
-            <a:pPr indent="0" marL="0">
+        </p:spPr>
+        <p:txBody>
+          <a:bodyPr wrap="square" rtlCol="0" anchor="ctr"/>
+          <a:lstStyle/>
+          <a:p>
+            <a:pPr marL="0" indent="0">
               <a:lnSpc>
                 <a:spcPct val="120000"/>
               </a:lnSpc>
@@ -3684,9 +3636,9 @@
                 <a:solidFill>
                   <a:srgbClr val="5B7A80"/>
                 </a:solidFill>
-                <a:latin typeface="Calibri" pitchFamily="34" charset="0"/>
-                <a:ea typeface="Calibri" pitchFamily="34" charset="-122"/>
-                <a:cs typeface="Calibri" pitchFamily="34" charset="-120"/>
+                <a:latin typeface="Calibri" panose="020F0502020204030204" pitchFamily="34" charset="0"/>
+                <a:ea typeface="Calibri" panose="020F0502020204030204" pitchFamily="34" charset="-122"/>
+                <a:cs typeface="Calibri" panose="020F0502020204030204" pitchFamily="34" charset="-120"/>
               </a:rPr>
               <a:t>Suffix-array / LCP-style matching scores how closely a course description aligns with a student's stated interests.</a:t>
             </a:r>
@@ -3713,7 +3665,6 @@
           <a:solidFill>
             <a:srgbClr val="F2F9F8"/>
           </a:solidFill>
-          <a:ln/>
         </p:spPr>
       </p:sp>
       <p:sp>
@@ -3733,7 +3684,6 @@
           <a:solidFill>
             <a:srgbClr val="00A896"/>
           </a:solidFill>
-          <a:ln/>
         </p:spPr>
       </p:sp>
       <p:sp>
@@ -3753,7 +3703,6 @@
           <a:solidFill>
             <a:srgbClr val="028090"/>
           </a:solidFill>
-          <a:ln/>
         </p:spPr>
       </p:sp>
       <p:sp>
@@ -3771,13 +3720,12 @@
             <a:avLst/>
           </a:prstGeom>
           <a:noFill/>
-          <a:ln/>
-        </p:spPr>
-        <p:txBody>
-          <a:bodyPr wrap="square" rtlCol="0" anchor="ctr"/>
-          <a:lstStyle/>
-          <a:p>
-            <a:pPr algn="ctr" indent="0" marL="0">
+        </p:spPr>
+        <p:txBody>
+          <a:bodyPr wrap="square" rtlCol="0" anchor="ctr"/>
+          <a:lstStyle/>
+          <a:p>
+            <a:pPr marL="0" indent="0" algn="ctr">
               <a:buNone/>
             </a:pPr>
             <a:r>
@@ -3785,9 +3733,9 @@
                 <a:solidFill>
                   <a:srgbClr val="FFFFFF"/>
                 </a:solidFill>
-                <a:latin typeface="Calibri" pitchFamily="34" charset="0"/>
-                <a:ea typeface="Calibri" pitchFamily="34" charset="-122"/>
-                <a:cs typeface="Calibri" pitchFamily="34" charset="-120"/>
+                <a:latin typeface="Calibri" panose="020F0502020204030204" pitchFamily="34" charset="0"/>
+                <a:ea typeface="Calibri" panose="020F0502020204030204" pitchFamily="34" charset="-122"/>
+                <a:cs typeface="Calibri" panose="020F0502020204030204" pitchFamily="34" charset="-120"/>
               </a:rPr>
               <a:t>→</a:t>
             </a:r>
@@ -3810,13 +3758,12 @@
             <a:avLst/>
           </a:prstGeom>
           <a:noFill/>
-          <a:ln/>
-        </p:spPr>
-        <p:txBody>
-          <a:bodyPr wrap="square" rtlCol="0" anchor="ctr"/>
-          <a:lstStyle/>
-          <a:p>
-            <a:pPr indent="0" marL="0">
+        </p:spPr>
+        <p:txBody>
+          <a:bodyPr wrap="square" rtlCol="0" anchor="ctr"/>
+          <a:lstStyle/>
+          <a:p>
+            <a:pPr marL="0" indent="0">
               <a:buNone/>
             </a:pPr>
             <a:r>
@@ -3824,9 +3771,9 @@
                 <a:solidFill>
                   <a:srgbClr val="16323A"/>
                 </a:solidFill>
-                <a:latin typeface="Cambria" pitchFamily="34" charset="0"/>
-                <a:ea typeface="Cambria" pitchFamily="34" charset="-122"/>
-                <a:cs typeface="Cambria" pitchFamily="34" charset="-120"/>
+                <a:latin typeface="Cambria" panose="02040503050406030204" pitchFamily="34" charset="0"/>
+                <a:ea typeface="Cambria" panose="02040503050406030204" pitchFamily="34" charset="-122"/>
+                <a:cs typeface="Cambria" panose="02040503050406030204" pitchFamily="34" charset="-120"/>
               </a:rPr>
               <a:t>Prerequisite Flow Validation</a:t>
             </a:r>
@@ -3849,13 +3796,12 @@
             <a:avLst/>
           </a:prstGeom>
           <a:noFill/>
-          <a:ln/>
-        </p:spPr>
-        <p:txBody>
-          <a:bodyPr wrap="square" rtlCol="0" anchor="ctr"/>
-          <a:lstStyle/>
-          <a:p>
-            <a:pPr indent="0" marL="0">
+        </p:spPr>
+        <p:txBody>
+          <a:bodyPr wrap="square" rtlCol="0" anchor="ctr"/>
+          <a:lstStyle/>
+          <a:p>
+            <a:pPr marL="0" indent="0">
               <a:lnSpc>
                 <a:spcPct val="120000"/>
               </a:lnSpc>
@@ -3866,9 +3812,9 @@
                 <a:solidFill>
                   <a:srgbClr val="5B7A80"/>
                 </a:solidFill>
-                <a:latin typeface="Calibri" pitchFamily="34" charset="0"/>
-                <a:ea typeface="Calibri" pitchFamily="34" charset="-122"/>
-                <a:cs typeface="Calibri" pitchFamily="34" charset="-120"/>
+                <a:latin typeface="Calibri" panose="020F0502020204030204" pitchFamily="34" charset="0"/>
+                <a:ea typeface="Calibri" panose="020F0502020204030204" pitchFamily="34" charset="-122"/>
+                <a:cs typeface="Calibri" panose="020F0502020204030204" pitchFamily="34" charset="-120"/>
               </a:rPr>
               <a:t>Prerequisite chains are modeled as a flow network; Ford-Fulkerson / Edmonds-Karp verify a feasible path to any target course.</a:t>
             </a:r>
@@ -3895,7 +3841,6 @@
           <a:solidFill>
             <a:srgbClr val="F2F9F8"/>
           </a:solidFill>
-          <a:ln/>
         </p:spPr>
       </p:sp>
       <p:sp>
@@ -3915,7 +3860,6 @@
           <a:solidFill>
             <a:srgbClr val="02C39A"/>
           </a:solidFill>
-          <a:ln/>
         </p:spPr>
       </p:sp>
       <p:sp>
@@ -3935,7 +3879,6 @@
           <a:solidFill>
             <a:srgbClr val="028090"/>
           </a:solidFill>
-          <a:ln/>
         </p:spPr>
       </p:sp>
       <p:sp>
@@ -3953,13 +3896,12 @@
             <a:avLst/>
           </a:prstGeom>
           <a:noFill/>
-          <a:ln/>
-        </p:spPr>
-        <p:txBody>
-          <a:bodyPr wrap="square" rtlCol="0" anchor="ctr"/>
-          <a:lstStyle/>
-          <a:p>
-            <a:pPr algn="ctr" indent="0" marL="0">
+        </p:spPr>
+        <p:txBody>
+          <a:bodyPr wrap="square" rtlCol="0" anchor="ctr"/>
+          <a:lstStyle/>
+          <a:p>
+            <a:pPr marL="0" indent="0" algn="ctr">
               <a:buNone/>
             </a:pPr>
             <a:r>
@@ -3967,9 +3909,9 @@
                 <a:solidFill>
                   <a:srgbClr val="FFFFFF"/>
                 </a:solidFill>
-                <a:latin typeface="Calibri" pitchFamily="34" charset="0"/>
-                <a:ea typeface="Calibri" pitchFamily="34" charset="-122"/>
-                <a:cs typeface="Calibri" pitchFamily="34" charset="-120"/>
+                <a:latin typeface="Calibri" panose="020F0502020204030204" pitchFamily="34" charset="0"/>
+                <a:ea typeface="Calibri" panose="020F0502020204030204" pitchFamily="34" charset="-122"/>
+                <a:cs typeface="Calibri" panose="020F0502020204030204" pitchFamily="34" charset="-120"/>
               </a:rPr>
               <a:t>▣</a:t>
             </a:r>
@@ -3992,13 +3934,12 @@
             <a:avLst/>
           </a:prstGeom>
           <a:noFill/>
-          <a:ln/>
-        </p:spPr>
-        <p:txBody>
-          <a:bodyPr wrap="square" rtlCol="0" anchor="ctr"/>
-          <a:lstStyle/>
-          <a:p>
-            <a:pPr indent="0" marL="0">
+        </p:spPr>
+        <p:txBody>
+          <a:bodyPr wrap="square" rtlCol="0" anchor="ctr"/>
+          <a:lstStyle/>
+          <a:p>
+            <a:pPr marL="0" indent="0">
               <a:buNone/>
             </a:pPr>
             <a:r>
@@ -4006,9 +3947,9 @@
                 <a:solidFill>
                   <a:srgbClr val="16323A"/>
                 </a:solidFill>
-                <a:latin typeface="Cambria" pitchFamily="34" charset="0"/>
-                <a:ea typeface="Cambria" pitchFamily="34" charset="-122"/>
-                <a:cs typeface="Cambria" pitchFamily="34" charset="-120"/>
+                <a:latin typeface="Cambria" panose="02040503050406030204" pitchFamily="34" charset="0"/>
+                <a:ea typeface="Cambria" panose="02040503050406030204" pitchFamily="34" charset="-122"/>
+                <a:cs typeface="Cambria" panose="02040503050406030204" pitchFamily="34" charset="-120"/>
               </a:rPr>
               <a:t>Optimal Plan Selection</a:t>
             </a:r>
@@ -4031,13 +3972,12 @@
             <a:avLst/>
           </a:prstGeom>
           <a:noFill/>
-          <a:ln/>
-        </p:spPr>
-        <p:txBody>
-          <a:bodyPr wrap="square" rtlCol="0" anchor="ctr"/>
-          <a:lstStyle/>
-          <a:p>
-            <a:pPr indent="0" marL="0">
+        </p:spPr>
+        <p:txBody>
+          <a:bodyPr wrap="square" rtlCol="0" anchor="ctr"/>
+          <a:lstStyle/>
+          <a:p>
+            <a:pPr marL="0" indent="0">
               <a:lnSpc>
                 <a:spcPct val="120000"/>
               </a:lnSpc>
@@ -4048,9 +3988,9 @@
                 <a:solidFill>
                   <a:srgbClr val="5B7A80"/>
                 </a:solidFill>
-                <a:latin typeface="Calibri" pitchFamily="34" charset="0"/>
-                <a:ea typeface="Calibri" pitchFamily="34" charset="-122"/>
-                <a:cs typeface="Calibri" pitchFamily="34" charset="-120"/>
+                <a:latin typeface="Calibri" panose="020F0502020204030204" pitchFamily="34" charset="0"/>
+                <a:ea typeface="Calibri" panose="020F0502020204030204" pitchFamily="34" charset="-122"/>
+                <a:cs typeface="Calibri" panose="020F0502020204030204" pitchFamily="34" charset="-120"/>
               </a:rPr>
               <a:t>Choosing courses under a fixed credit budget is NP-hard (knapsack-like); bitmask DP and a 2-approximation heuristic return near-optimal plans.</a:t>
             </a:r>
@@ -4077,7 +4017,6 @@
           <a:solidFill>
             <a:srgbClr val="F2F9F8"/>
           </a:solidFill>
-          <a:ln/>
         </p:spPr>
       </p:sp>
       <p:sp>
@@ -4097,7 +4036,6 @@
           <a:solidFill>
             <a:srgbClr val="02C39A"/>
           </a:solidFill>
-          <a:ln/>
         </p:spPr>
       </p:sp>
       <p:sp>
@@ -4117,7 +4055,6 @@
           <a:solidFill>
             <a:srgbClr val="028090"/>
           </a:solidFill>
-          <a:ln/>
         </p:spPr>
       </p:sp>
       <p:sp>
@@ -4135,13 +4072,12 @@
             <a:avLst/>
           </a:prstGeom>
           <a:noFill/>
-          <a:ln/>
-        </p:spPr>
-        <p:txBody>
-          <a:bodyPr wrap="square" rtlCol="0" anchor="ctr"/>
-          <a:lstStyle/>
-          <a:p>
-            <a:pPr algn="ctr" indent="0" marL="0">
+        </p:spPr>
+        <p:txBody>
+          <a:bodyPr wrap="square" rtlCol="0" anchor="ctr"/>
+          <a:lstStyle/>
+          <a:p>
+            <a:pPr marL="0" indent="0" algn="ctr">
               <a:buNone/>
             </a:pPr>
             <a:r>
@@ -4149,9 +4085,9 @@
                 <a:solidFill>
                   <a:srgbClr val="FFFFFF"/>
                 </a:solidFill>
-                <a:latin typeface="Calibri" pitchFamily="34" charset="0"/>
-                <a:ea typeface="Calibri" pitchFamily="34" charset="-122"/>
-                <a:cs typeface="Calibri" pitchFamily="34" charset="-120"/>
+                <a:latin typeface="Calibri" panose="020F0502020204030204" pitchFamily="34" charset="0"/>
+                <a:ea typeface="Calibri" panose="020F0502020204030204" pitchFamily="34" charset="-122"/>
+                <a:cs typeface="Calibri" panose="020F0502020204030204" pitchFamily="34" charset="-120"/>
               </a:rPr>
               <a:t>○</a:t>
             </a:r>
@@ -4174,13 +4110,12 @@
             <a:avLst/>
           </a:prstGeom>
           <a:noFill/>
-          <a:ln/>
-        </p:spPr>
-        <p:txBody>
-          <a:bodyPr wrap="square" rtlCol="0" anchor="ctr"/>
-          <a:lstStyle/>
-          <a:p>
-            <a:pPr indent="0" marL="0">
+        </p:spPr>
+        <p:txBody>
+          <a:bodyPr wrap="square" rtlCol="0" anchor="ctr"/>
+          <a:lstStyle/>
+          <a:p>
+            <a:pPr marL="0" indent="0">
               <a:buNone/>
             </a:pPr>
             <a:r>
@@ -4188,9 +4123,9 @@
                 <a:solidFill>
                   <a:srgbClr val="16323A"/>
                 </a:solidFill>
-                <a:latin typeface="Cambria" pitchFamily="34" charset="0"/>
-                <a:ea typeface="Cambria" pitchFamily="34" charset="-122"/>
-                <a:cs typeface="Cambria" pitchFamily="34" charset="-120"/>
+                <a:latin typeface="Cambria" panose="02040503050406030204" pitchFamily="34" charset="0"/>
+                <a:ea typeface="Cambria" panose="02040503050406030204" pitchFamily="34" charset="-122"/>
+                <a:cs typeface="Cambria" panose="02040503050406030204" pitchFamily="34" charset="-120"/>
               </a:rPr>
               <a:t>Fast Ranked Recommendations</a:t>
             </a:r>
@@ -4213,13 +4148,12 @@
             <a:avLst/>
           </a:prstGeom>
           <a:noFill/>
-          <a:ln/>
-        </p:spPr>
-        <p:txBody>
-          <a:bodyPr wrap="square" rtlCol="0" anchor="ctr"/>
-          <a:lstStyle/>
-          <a:p>
-            <a:pPr indent="0" marL="0">
+        </p:spPr>
+        <p:txBody>
+          <a:bodyPr wrap="square" rtlCol="0" anchor="ctr"/>
+          <a:lstStyle/>
+          <a:p>
+            <a:pPr marL="0" indent="0">
               <a:lnSpc>
                 <a:spcPct val="120000"/>
               </a:lnSpc>
@@ -4230,9 +4164,9 @@
                 <a:solidFill>
                   <a:srgbClr val="5B7A80"/>
                 </a:solidFill>
-                <a:latin typeface="Calibri" pitchFamily="34" charset="0"/>
-                <a:ea typeface="Calibri" pitchFamily="34" charset="-122"/>
-                <a:cs typeface="Calibri" pitchFamily="34" charset="-120"/>
+                <a:latin typeface="Calibri" panose="020F0502020204030204" pitchFamily="34" charset="0"/>
+                <a:ea typeface="Calibri" panose="020F0502020204030204" pitchFamily="34" charset="-122"/>
+                <a:cs typeface="Calibri" panose="020F0502020204030204" pitchFamily="34" charset="-120"/>
               </a:rPr>
               <a:t>Randomized hashing and reservoir sampling rank and diversify top course suggestions in near-constant time.</a:t>
             </a:r>
@@ -4259,7 +4193,6 @@
           <a:solidFill>
             <a:srgbClr val="F2F9F8"/>
           </a:solidFill>
-          <a:ln/>
         </p:spPr>
       </p:sp>
       <p:sp>
@@ -4279,7 +4212,6 @@
           <a:solidFill>
             <a:srgbClr val="02C39A"/>
           </a:solidFill>
-          <a:ln/>
         </p:spPr>
       </p:sp>
       <p:sp>
@@ -4299,7 +4231,6 @@
           <a:solidFill>
             <a:srgbClr val="028090"/>
           </a:solidFill>
-          <a:ln/>
         </p:spPr>
       </p:sp>
       <p:sp>
@@ -4317,13 +4248,12 @@
             <a:avLst/>
           </a:prstGeom>
           <a:noFill/>
-          <a:ln/>
-        </p:spPr>
-        <p:txBody>
-          <a:bodyPr wrap="square" rtlCol="0" anchor="ctr"/>
-          <a:lstStyle/>
-          <a:p>
-            <a:pPr algn="ctr" indent="0" marL="0">
+        </p:spPr>
+        <p:txBody>
+          <a:bodyPr wrap="square" rtlCol="0" anchor="ctr"/>
+          <a:lstStyle/>
+          <a:p>
+            <a:pPr marL="0" indent="0" algn="ctr">
               <a:buNone/>
             </a:pPr>
             <a:r>
@@ -4331,9 +4261,9 @@
                 <a:solidFill>
                   <a:srgbClr val="FFFFFF"/>
                 </a:solidFill>
-                <a:latin typeface="Calibri" pitchFamily="34" charset="0"/>
-                <a:ea typeface="Calibri" pitchFamily="34" charset="-122"/>
-                <a:cs typeface="Calibri" pitchFamily="34" charset="-120"/>
+                <a:latin typeface="Calibri" panose="020F0502020204030204" pitchFamily="34" charset="0"/>
+                <a:ea typeface="Calibri" panose="020F0502020204030204" pitchFamily="34" charset="-122"/>
+                <a:cs typeface="Calibri" panose="020F0502020204030204" pitchFamily="34" charset="-120"/>
               </a:rPr>
               <a:t>⚙</a:t>
             </a:r>
@@ -4356,13 +4286,12 @@
             <a:avLst/>
           </a:prstGeom>
           <a:noFill/>
-          <a:ln/>
-        </p:spPr>
-        <p:txBody>
-          <a:bodyPr wrap="square" rtlCol="0" anchor="ctr"/>
-          <a:lstStyle/>
-          <a:p>
-            <a:pPr indent="0" marL="0">
+        </p:spPr>
+        <p:txBody>
+          <a:bodyPr wrap="square" rtlCol="0" anchor="ctr"/>
+          <a:lstStyle/>
+          <a:p>
+            <a:pPr marL="0" indent="0">
               <a:buNone/>
             </a:pPr>
             <a:r>
@@ -4370,9 +4299,9 @@
                 <a:solidFill>
                   <a:srgbClr val="16323A"/>
                 </a:solidFill>
-                <a:latin typeface="Cambria" pitchFamily="34" charset="0"/>
-                <a:ea typeface="Cambria" pitchFamily="34" charset="-122"/>
-                <a:cs typeface="Cambria" pitchFamily="34" charset="-120"/>
+                <a:latin typeface="Cambria" panose="02040503050406030204" pitchFamily="34" charset="0"/>
+                <a:ea typeface="Cambria" panose="02040503050406030204" pitchFamily="34" charset="-122"/>
+                <a:cs typeface="Cambria" panose="02040503050406030204" pitchFamily="34" charset="-120"/>
               </a:rPr>
               <a:t>Scalable Batch Processing</a:t>
             </a:r>
@@ -4395,13 +4324,12 @@
             <a:avLst/>
           </a:prstGeom>
           <a:noFill/>
-          <a:ln/>
-        </p:spPr>
-        <p:txBody>
-          <a:bodyPr wrap="square" rtlCol="0" anchor="ctr"/>
-          <a:lstStyle/>
-          <a:p>
-            <a:pPr indent="0" marL="0">
+        </p:spPr>
+        <p:txBody>
+          <a:bodyPr wrap="square" rtlCol="0" anchor="ctr"/>
+          <a:lstStyle/>
+          <a:p>
+            <a:pPr marL="0" indent="0">
               <a:lnSpc>
                 <a:spcPct val="120000"/>
               </a:lnSpc>
@@ -4412,9 +4340,9 @@
                 <a:solidFill>
                   <a:srgbClr val="5B7A80"/>
                 </a:solidFill>
-                <a:latin typeface="Calibri" pitchFamily="34" charset="0"/>
-                <a:ea typeface="Calibri" pitchFamily="34" charset="-122"/>
-                <a:cs typeface="Calibri" pitchFamily="34" charset="-120"/>
+                <a:latin typeface="Calibri" panose="020F0502020204030204" pitchFamily="34" charset="0"/>
+                <a:ea typeface="Calibri" panose="020F0502020204030204" pitchFamily="34" charset="-122"/>
+                <a:cs typeface="Calibri" panose="020F0502020204030204" pitchFamily="34" charset="-120"/>
               </a:rPr>
               <a:t>Parallel prefix-sum / reduce primitives let the engine re-rank an entire catalog as new interest data arrives.</a:t>
             </a:r>
@@ -4437,13 +4365,12 @@
             <a:avLst/>
           </a:prstGeom>
           <a:noFill/>
-          <a:ln/>
-        </p:spPr>
-        <p:txBody>
-          <a:bodyPr wrap="square" rtlCol="0" anchor="ctr"/>
-          <a:lstStyle/>
-          <a:p>
-            <a:pPr algn="r" indent="0" marL="0">
+        </p:spPr>
+        <p:txBody>
+          <a:bodyPr wrap="square" rtlCol="0" anchor="ctr"/>
+          <a:lstStyle/>
+          <a:p>
+            <a:pPr marL="0" indent="0" algn="r">
               <a:buNone/>
             </a:pPr>
             <a:r>
@@ -4451,9 +4378,9 @@
                 <a:solidFill>
                   <a:srgbClr val="5B7A80"/>
                 </a:solidFill>
-                <a:latin typeface="Calibri" pitchFamily="34" charset="0"/>
-                <a:ea typeface="Calibri" pitchFamily="34" charset="-122"/>
-                <a:cs typeface="Calibri" pitchFamily="34" charset="-120"/>
+                <a:latin typeface="Calibri" panose="020F0502020204030204" pitchFamily="34" charset="0"/>
+                <a:ea typeface="Calibri" panose="020F0502020204030204" pitchFamily="34" charset="-122"/>
+                <a:cs typeface="Calibri" panose="020F0502020204030204" pitchFamily="34" charset="-120"/>
               </a:rPr>
               <a:t>04</a:t>
             </a:r>
@@ -4471,12 +4398,13 @@
 
 <file path=ppt/slides/slide5.xml><?xml version="1.0" encoding="utf-8"?>
 <p:sld xmlns:a="http://schemas.openxmlformats.org/drawingml/2006/main" xmlns:r="http://schemas.openxmlformats.org/officeDocument/2006/relationships" xmlns:p="http://schemas.openxmlformats.org/presentationml/2006/main">
-  <p:cSld name="Slide 5">
+  <p:cSld>
     <p:bg>
       <p:bgPr>
         <a:solidFill>
           <a:srgbClr val="F2F9F8"/>
         </a:solidFill>
+        <a:effectLst/>
       </p:bgPr>
     </p:bg>
     <p:spTree>
@@ -4508,13 +4436,12 @@
             <a:avLst/>
           </a:prstGeom>
           <a:noFill/>
-          <a:ln/>
-        </p:spPr>
-        <p:txBody>
-          <a:bodyPr wrap="square" rtlCol="0" anchor="ctr"/>
-          <a:lstStyle/>
-          <a:p>
-            <a:pPr indent="0" marL="0">
+        </p:spPr>
+        <p:txBody>
+          <a:bodyPr wrap="square" rtlCol="0" anchor="ctr"/>
+          <a:lstStyle/>
+          <a:p>
+            <a:pPr marL="0" indent="0">
               <a:buNone/>
             </a:pPr>
             <a:r>
@@ -4522,9 +4449,9 @@
                 <a:solidFill>
                   <a:srgbClr val="16323A"/>
                 </a:solidFill>
-                <a:latin typeface="Cambria" pitchFamily="34" charset="0"/>
-                <a:ea typeface="Cambria" pitchFamily="34" charset="-122"/>
-                <a:cs typeface="Cambria" pitchFamily="34" charset="-120"/>
+                <a:latin typeface="Cambria" panose="02040503050406030204" pitchFamily="34" charset="0"/>
+                <a:ea typeface="Cambria" panose="02040503050406030204" pitchFamily="34" charset="-122"/>
+                <a:cs typeface="Cambria" panose="02040503050406030204" pitchFamily="34" charset="-120"/>
               </a:rPr>
               <a:t>Tools &amp; Technologies</a:t>
             </a:r>
@@ -4549,7 +4476,6 @@
           <a:solidFill>
             <a:srgbClr val="02C39A"/>
           </a:solidFill>
-          <a:ln/>
         </p:spPr>
       </p:sp>
       <p:sp>
@@ -4571,9 +4497,8 @@
           <a:solidFill>
             <a:srgbClr val="FFFFFF"/>
           </a:solidFill>
-          <a:ln/>
           <a:effectLst>
-            <a:outerShdw sx="100000" sy="100000" kx="0" ky="0" algn="bl" rotWithShape="0" blurRad="63500" dist="25400" dir="5400000">
+            <a:outerShdw blurRad="63500" dist="25400" dir="5400000" algn="bl" rotWithShape="0">
               <a:srgbClr val="1B2E35">
                 <a:alpha val="10000"/>
               </a:srgbClr>
@@ -4598,7 +4523,6 @@
           <a:solidFill>
             <a:srgbClr val="00A896"/>
           </a:solidFill>
-          <a:ln/>
         </p:spPr>
       </p:sp>
       <p:sp>
@@ -4616,13 +4540,12 @@
             <a:avLst/>
           </a:prstGeom>
           <a:noFill/>
-          <a:ln/>
-        </p:spPr>
-        <p:txBody>
-          <a:bodyPr wrap="square" rtlCol="0" anchor="ctr"/>
-          <a:lstStyle/>
-          <a:p>
-            <a:pPr algn="ctr" indent="0" marL="0">
+        </p:spPr>
+        <p:txBody>
+          <a:bodyPr wrap="square" rtlCol="0" anchor="ctr"/>
+          <a:lstStyle/>
+          <a:p>
+            <a:pPr marL="0" indent="0" algn="ctr">
               <a:buNone/>
             </a:pPr>
             <a:r>
@@ -4630,9 +4553,9 @@
                 <a:solidFill>
                   <a:srgbClr val="FFFFFF"/>
                 </a:solidFill>
-                <a:latin typeface="Calibri" pitchFamily="34" charset="0"/>
-                <a:ea typeface="Calibri" pitchFamily="34" charset="-122"/>
-                <a:cs typeface="Calibri" pitchFamily="34" charset="-120"/>
+                <a:latin typeface="Calibri" panose="020F0502020204030204" pitchFamily="34" charset="0"/>
+                <a:ea typeface="Calibri" panose="020F0502020204030204" pitchFamily="34" charset="-122"/>
+                <a:cs typeface="Calibri" panose="020F0502020204030204" pitchFamily="34" charset="-120"/>
               </a:rPr>
               <a:t>1</a:t>
             </a:r>
@@ -4655,13 +4578,12 @@
             <a:avLst/>
           </a:prstGeom>
           <a:noFill/>
-          <a:ln/>
-        </p:spPr>
-        <p:txBody>
-          <a:bodyPr wrap="square" rtlCol="0" anchor="ctr"/>
-          <a:lstStyle/>
-          <a:p>
-            <a:pPr indent="0" marL="0">
+        </p:spPr>
+        <p:txBody>
+          <a:bodyPr wrap="square" rtlCol="0" anchor="ctr"/>
+          <a:lstStyle/>
+          <a:p>
+            <a:pPr marL="0" indent="0">
               <a:buNone/>
             </a:pPr>
             <a:r>
@@ -4669,9 +4591,9 @@
                 <a:solidFill>
                   <a:srgbClr val="028090"/>
                 </a:solidFill>
-                <a:latin typeface="Cambria" pitchFamily="34" charset="0"/>
-                <a:ea typeface="Cambria" pitchFamily="34" charset="-122"/>
-                <a:cs typeface="Cambria" pitchFamily="34" charset="-120"/>
+                <a:latin typeface="Cambria" panose="02040503050406030204" pitchFamily="34" charset="0"/>
+                <a:ea typeface="Cambria" panose="02040503050406030204" pitchFamily="34" charset="-122"/>
+                <a:cs typeface="Cambria" panose="02040503050406030204" pitchFamily="34" charset="-120"/>
               </a:rPr>
               <a:t>Core Engine</a:t>
             </a:r>
@@ -4694,13 +4616,12 @@
             <a:avLst/>
           </a:prstGeom>
           <a:noFill/>
-          <a:ln/>
-        </p:spPr>
-        <p:txBody>
-          <a:bodyPr wrap="square" rtlCol="0" anchor="ctr"/>
-          <a:lstStyle/>
-          <a:p>
-            <a:pPr indent="0" marL="0">
+        </p:spPr>
+        <p:txBody>
+          <a:bodyPr wrap="square" rtlCol="0" anchor="ctr"/>
+          <a:lstStyle/>
+          <a:p>
+            <a:pPr marL="0" indent="0">
               <a:lnSpc>
                 <a:spcPct val="115000"/>
               </a:lnSpc>
@@ -4711,9 +4632,9 @@
                 <a:solidFill>
                   <a:srgbClr val="16323A"/>
                 </a:solidFill>
-                <a:latin typeface="Calibri" pitchFamily="34" charset="0"/>
-                <a:ea typeface="Calibri" pitchFamily="34" charset="-122"/>
-                <a:cs typeface="Calibri" pitchFamily="34" charset="-120"/>
+                <a:latin typeface="Calibri" panose="020F0502020204030204" pitchFamily="34" charset="0"/>
+                <a:ea typeface="Calibri" panose="020F0502020204030204" pitchFamily="34" charset="-122"/>
+                <a:cs typeface="Calibri" panose="020F0502020204030204" pitchFamily="34" charset="-120"/>
               </a:rPr>
               <a:t>Java (hand-built data structures &amp; algorithms — no java.util.* collections, per project constraint)</a:t>
             </a:r>
@@ -4740,9 +4661,8 @@
           <a:solidFill>
             <a:srgbClr val="FFFFFF"/>
           </a:solidFill>
-          <a:ln/>
           <a:effectLst>
-            <a:outerShdw sx="100000" sy="100000" kx="0" ky="0" algn="bl" rotWithShape="0" blurRad="63500" dist="25400" dir="5400000">
+            <a:outerShdw blurRad="63500" dist="25400" dir="5400000" algn="bl" rotWithShape="0">
               <a:srgbClr val="1B2E35">
                 <a:alpha val="10000"/>
               </a:srgbClr>
@@ -4767,7 +4687,6 @@
           <a:solidFill>
             <a:srgbClr val="00A896"/>
           </a:solidFill>
-          <a:ln/>
         </p:spPr>
       </p:sp>
       <p:sp>
@@ -4785,13 +4704,12 @@
             <a:avLst/>
           </a:prstGeom>
           <a:noFill/>
-          <a:ln/>
-        </p:spPr>
-        <p:txBody>
-          <a:bodyPr wrap="square" rtlCol="0" anchor="ctr"/>
-          <a:lstStyle/>
-          <a:p>
-            <a:pPr algn="ctr" indent="0" marL="0">
+        </p:spPr>
+        <p:txBody>
+          <a:bodyPr wrap="square" rtlCol="0" anchor="ctr"/>
+          <a:lstStyle/>
+          <a:p>
+            <a:pPr marL="0" indent="0" algn="ctr">
               <a:buNone/>
             </a:pPr>
             <a:r>
@@ -4799,9 +4717,9 @@
                 <a:solidFill>
                   <a:srgbClr val="FFFFFF"/>
                 </a:solidFill>
-                <a:latin typeface="Calibri" pitchFamily="34" charset="0"/>
-                <a:ea typeface="Calibri" pitchFamily="34" charset="-122"/>
-                <a:cs typeface="Calibri" pitchFamily="34" charset="-120"/>
+                <a:latin typeface="Calibri" panose="020F0502020204030204" pitchFamily="34" charset="0"/>
+                <a:ea typeface="Calibri" panose="020F0502020204030204" pitchFamily="34" charset="-122"/>
+                <a:cs typeface="Calibri" panose="020F0502020204030204" pitchFamily="34" charset="-120"/>
               </a:rPr>
               <a:t>2</a:t>
             </a:r>
@@ -4824,13 +4742,12 @@
             <a:avLst/>
           </a:prstGeom>
           <a:noFill/>
-          <a:ln/>
-        </p:spPr>
-        <p:txBody>
-          <a:bodyPr wrap="square" rtlCol="0" anchor="ctr"/>
-          <a:lstStyle/>
-          <a:p>
-            <a:pPr indent="0" marL="0">
+        </p:spPr>
+        <p:txBody>
+          <a:bodyPr wrap="square" rtlCol="0" anchor="ctr"/>
+          <a:lstStyle/>
+          <a:p>
+            <a:pPr marL="0" indent="0">
               <a:buNone/>
             </a:pPr>
             <a:r>
@@ -4838,9 +4755,9 @@
                 <a:solidFill>
                   <a:srgbClr val="028090"/>
                 </a:solidFill>
-                <a:latin typeface="Cambria" pitchFamily="34" charset="0"/>
-                <a:ea typeface="Cambria" pitchFamily="34" charset="-122"/>
-                <a:cs typeface="Cambria" pitchFamily="34" charset="-120"/>
+                <a:latin typeface="Cambria" panose="02040503050406030204" pitchFamily="34" charset="0"/>
+                <a:ea typeface="Cambria" panose="02040503050406030204" pitchFamily="34" charset="-122"/>
+                <a:cs typeface="Cambria" panose="02040503050406030204" pitchFamily="34" charset="-120"/>
               </a:rPr>
               <a:t>Algorithms</a:t>
             </a:r>
@@ -4863,13 +4780,12 @@
             <a:avLst/>
           </a:prstGeom>
           <a:noFill/>
-          <a:ln/>
-        </p:spPr>
-        <p:txBody>
-          <a:bodyPr wrap="square" rtlCol="0" anchor="ctr"/>
-          <a:lstStyle/>
-          <a:p>
-            <a:pPr indent="0" marL="0">
+        </p:spPr>
+        <p:txBody>
+          <a:bodyPr wrap="square" rtlCol="0" anchor="ctr"/>
+          <a:lstStyle/>
+          <a:p>
+            <a:pPr marL="0" indent="0">
               <a:lnSpc>
                 <a:spcPct val="115000"/>
               </a:lnSpc>
@@ -4880,9 +4796,9 @@
                 <a:solidFill>
                   <a:srgbClr val="16323A"/>
                 </a:solidFill>
-                <a:latin typeface="Calibri" pitchFamily="34" charset="0"/>
-                <a:ea typeface="Calibri" pitchFamily="34" charset="-122"/>
-                <a:cs typeface="Calibri" pitchFamily="34" charset="-120"/>
+                <a:latin typeface="Calibri" panose="020F0502020204030204" pitchFamily="34" charset="0"/>
+                <a:ea typeface="Calibri" panose="020F0502020204030204" pitchFamily="34" charset="-122"/>
+                <a:cs typeface="Calibri" panose="020F0502020204030204" pitchFamily="34" charset="-120"/>
               </a:rPr>
               <a:t>Custom KMP, Rabin-Karp, Wagner-Fischer DP, Ford-Fulkerson/Edmonds-Karp, bitmask DP, Miller-Rabin, reservoir sampling</a:t>
             </a:r>
@@ -4909,9 +4825,8 @@
           <a:solidFill>
             <a:srgbClr val="FFFFFF"/>
           </a:solidFill>
-          <a:ln/>
           <a:effectLst>
-            <a:outerShdw sx="100000" sy="100000" kx="0" ky="0" algn="bl" rotWithShape="0" blurRad="63500" dist="25400" dir="5400000">
+            <a:outerShdw blurRad="63500" dist="25400" dir="5400000" algn="bl" rotWithShape="0">
               <a:srgbClr val="1B2E35">
                 <a:alpha val="10000"/>
               </a:srgbClr>
@@ -4936,7 +4851,6 @@
           <a:solidFill>
             <a:srgbClr val="00A896"/>
           </a:solidFill>
-          <a:ln/>
         </p:spPr>
       </p:sp>
       <p:sp>
@@ -4954,13 +4868,12 @@
             <a:avLst/>
           </a:prstGeom>
           <a:noFill/>
-          <a:ln/>
-        </p:spPr>
-        <p:txBody>
-          <a:bodyPr wrap="square" rtlCol="0" anchor="ctr"/>
-          <a:lstStyle/>
-          <a:p>
-            <a:pPr algn="ctr" indent="0" marL="0">
+        </p:spPr>
+        <p:txBody>
+          <a:bodyPr wrap="square" rtlCol="0" anchor="ctr"/>
+          <a:lstStyle/>
+          <a:p>
+            <a:pPr marL="0" indent="0" algn="ctr">
               <a:buNone/>
             </a:pPr>
             <a:r>
@@ -4968,9 +4881,9 @@
                 <a:solidFill>
                   <a:srgbClr val="FFFFFF"/>
                 </a:solidFill>
-                <a:latin typeface="Calibri" pitchFamily="34" charset="0"/>
-                <a:ea typeface="Calibri" pitchFamily="34" charset="-122"/>
-                <a:cs typeface="Calibri" pitchFamily="34" charset="-120"/>
+                <a:latin typeface="Calibri" panose="020F0502020204030204" pitchFamily="34" charset="0"/>
+                <a:ea typeface="Calibri" panose="020F0502020204030204" pitchFamily="34" charset="-122"/>
+                <a:cs typeface="Calibri" panose="020F0502020204030204" pitchFamily="34" charset="-120"/>
               </a:rPr>
               <a:t>3</a:t>
             </a:r>
@@ -4993,13 +4906,12 @@
             <a:avLst/>
           </a:prstGeom>
           <a:noFill/>
-          <a:ln/>
-        </p:spPr>
-        <p:txBody>
-          <a:bodyPr wrap="square" rtlCol="0" anchor="ctr"/>
-          <a:lstStyle/>
-          <a:p>
-            <a:pPr indent="0" marL="0">
+        </p:spPr>
+        <p:txBody>
+          <a:bodyPr wrap="square" rtlCol="0" anchor="ctr"/>
+          <a:lstStyle/>
+          <a:p>
+            <a:pPr marL="0" indent="0">
               <a:buNone/>
             </a:pPr>
             <a:r>
@@ -5007,9 +4919,9 @@
                 <a:solidFill>
                   <a:srgbClr val="028090"/>
                 </a:solidFill>
-                <a:latin typeface="Cambria" pitchFamily="34" charset="0"/>
-                <a:ea typeface="Cambria" pitchFamily="34" charset="-122"/>
-                <a:cs typeface="Cambria" pitchFamily="34" charset="-120"/>
+                <a:latin typeface="Cambria" panose="02040503050406030204" pitchFamily="34" charset="0"/>
+                <a:ea typeface="Cambria" panose="02040503050406030204" pitchFamily="34" charset="-122"/>
+                <a:cs typeface="Cambria" panose="02040503050406030204" pitchFamily="34" charset="-120"/>
               </a:rPr>
               <a:t>Data Storage</a:t>
             </a:r>
@@ -5032,13 +4944,12 @@
             <a:avLst/>
           </a:prstGeom>
           <a:noFill/>
-          <a:ln/>
-        </p:spPr>
-        <p:txBody>
-          <a:bodyPr wrap="square" rtlCol="0" anchor="ctr"/>
-          <a:lstStyle/>
-          <a:p>
-            <a:pPr indent="0" marL="0">
+        </p:spPr>
+        <p:txBody>
+          <a:bodyPr wrap="square" rtlCol="0" anchor="ctr"/>
+          <a:lstStyle/>
+          <a:p>
+            <a:pPr marL="0" indent="0">
               <a:lnSpc>
                 <a:spcPct val="115000"/>
               </a:lnSpc>
@@ -5049,9 +4960,9 @@
                 <a:solidFill>
                   <a:srgbClr val="16323A"/>
                 </a:solidFill>
-                <a:latin typeface="Calibri" pitchFamily="34" charset="0"/>
-                <a:ea typeface="Calibri" pitchFamily="34" charset="-122"/>
-                <a:cs typeface="Calibri" pitchFamily="34" charset="-120"/>
+                <a:latin typeface="Calibri" panose="020F0502020204030204" pitchFamily="34" charset="0"/>
+                <a:ea typeface="Calibri" panose="020F0502020204030204" pitchFamily="34" charset="-122"/>
+                <a:cs typeface="Calibri" panose="020F0502020204030204" pitchFamily="34" charset="-120"/>
               </a:rPr>
               <a:t>Flat-file / lightweight database of course records, prerequisites, and student interest profiles</a:t>
             </a:r>
@@ -5078,9 +4989,8 @@
           <a:solidFill>
             <a:srgbClr val="FFFFFF"/>
           </a:solidFill>
-          <a:ln/>
           <a:effectLst>
-            <a:outerShdw sx="100000" sy="100000" kx="0" ky="0" algn="bl" rotWithShape="0" blurRad="63500" dist="25400" dir="5400000">
+            <a:outerShdw blurRad="63500" dist="25400" dir="5400000" algn="bl" rotWithShape="0">
               <a:srgbClr val="1B2E35">
                 <a:alpha val="10000"/>
               </a:srgbClr>
@@ -5105,7 +5015,6 @@
           <a:solidFill>
             <a:srgbClr val="00A896"/>
           </a:solidFill>
-          <a:ln/>
         </p:spPr>
       </p:sp>
       <p:sp>
@@ -5123,13 +5032,12 @@
             <a:avLst/>
           </a:prstGeom>
           <a:noFill/>
-          <a:ln/>
-        </p:spPr>
-        <p:txBody>
-          <a:bodyPr wrap="square" rtlCol="0" anchor="ctr"/>
-          <a:lstStyle/>
-          <a:p>
-            <a:pPr algn="ctr" indent="0" marL="0">
+        </p:spPr>
+        <p:txBody>
+          <a:bodyPr wrap="square" rtlCol="0" anchor="ctr"/>
+          <a:lstStyle/>
+          <a:p>
+            <a:pPr marL="0" indent="0" algn="ctr">
               <a:buNone/>
             </a:pPr>
             <a:r>
@@ -5137,9 +5045,9 @@
                 <a:solidFill>
                   <a:srgbClr val="FFFFFF"/>
                 </a:solidFill>
-                <a:latin typeface="Calibri" pitchFamily="34" charset="0"/>
-                <a:ea typeface="Calibri" pitchFamily="34" charset="-122"/>
-                <a:cs typeface="Calibri" pitchFamily="34" charset="-120"/>
+                <a:latin typeface="Calibri" panose="020F0502020204030204" pitchFamily="34" charset="0"/>
+                <a:ea typeface="Calibri" panose="020F0502020204030204" pitchFamily="34" charset="-122"/>
+                <a:cs typeface="Calibri" panose="020F0502020204030204" pitchFamily="34" charset="-120"/>
               </a:rPr>
               <a:t>4</a:t>
             </a:r>
@@ -5162,13 +5070,12 @@
             <a:avLst/>
           </a:prstGeom>
           <a:noFill/>
-          <a:ln/>
-        </p:spPr>
-        <p:txBody>
-          <a:bodyPr wrap="square" rtlCol="0" anchor="ctr"/>
-          <a:lstStyle/>
-          <a:p>
-            <a:pPr indent="0" marL="0">
+        </p:spPr>
+        <p:txBody>
+          <a:bodyPr wrap="square" rtlCol="0" anchor="ctr"/>
+          <a:lstStyle/>
+          <a:p>
+            <a:pPr marL="0" indent="0">
               <a:buNone/>
             </a:pPr>
             <a:r>
@@ -5176,9 +5083,9 @@
                 <a:solidFill>
                   <a:srgbClr val="028090"/>
                 </a:solidFill>
-                <a:latin typeface="Cambria" pitchFamily="34" charset="0"/>
-                <a:ea typeface="Cambria" pitchFamily="34" charset="-122"/>
-                <a:cs typeface="Cambria" pitchFamily="34" charset="-120"/>
+                <a:latin typeface="Cambria" panose="02040503050406030204" pitchFamily="34" charset="0"/>
+                <a:ea typeface="Cambria" panose="02040503050406030204" pitchFamily="34" charset="-122"/>
+                <a:cs typeface="Cambria" panose="02040503050406030204" pitchFamily="34" charset="-120"/>
               </a:rPr>
               <a:t>Interface</a:t>
             </a:r>
@@ -5201,13 +5108,12 @@
             <a:avLst/>
           </a:prstGeom>
           <a:noFill/>
-          <a:ln/>
-        </p:spPr>
-        <p:txBody>
-          <a:bodyPr wrap="square" rtlCol="0" anchor="ctr"/>
-          <a:lstStyle/>
-          <a:p>
-            <a:pPr indent="0" marL="0">
+        </p:spPr>
+        <p:txBody>
+          <a:bodyPr wrap="square" rtlCol="0" anchor="ctr"/>
+          <a:lstStyle/>
+          <a:p>
+            <a:pPr marL="0" indent="0">
               <a:lnSpc>
                 <a:spcPct val="115000"/>
               </a:lnSpc>
@@ -5218,9 +5124,9 @@
                 <a:solidFill>
                   <a:srgbClr val="16323A"/>
                 </a:solidFill>
-                <a:latin typeface="Calibri" pitchFamily="34" charset="0"/>
-                <a:ea typeface="Calibri" pitchFamily="34" charset="-122"/>
-                <a:cs typeface="Calibri" pitchFamily="34" charset="-120"/>
+                <a:latin typeface="Calibri" panose="020F0502020204030204" pitchFamily="34" charset="0"/>
+                <a:ea typeface="Calibri" panose="020F0502020204030204" pitchFamily="34" charset="-122"/>
+                <a:cs typeface="Calibri" panose="020F0502020204030204" pitchFamily="34" charset="-120"/>
               </a:rPr>
               <a:t>Java Swing or a lightweight web front-end (HTML/CSS/JS) for query input and recommendation display</a:t>
             </a:r>
@@ -5247,9 +5153,8 @@
           <a:solidFill>
             <a:srgbClr val="FFFFFF"/>
           </a:solidFill>
-          <a:ln/>
           <a:effectLst>
-            <a:outerShdw sx="100000" sy="100000" kx="0" ky="0" algn="bl" rotWithShape="0" blurRad="63500" dist="25400" dir="5400000">
+            <a:outerShdw blurRad="63500" dist="25400" dir="5400000" algn="bl" rotWithShape="0">
               <a:srgbClr val="1B2E35">
                 <a:alpha val="10000"/>
               </a:srgbClr>
@@ -5274,7 +5179,6 @@
           <a:solidFill>
             <a:srgbClr val="00A896"/>
           </a:solidFill>
-          <a:ln/>
         </p:spPr>
       </p:sp>
       <p:sp>
@@ -5292,13 +5196,12 @@
             <a:avLst/>
           </a:prstGeom>
           <a:noFill/>
-          <a:ln/>
-        </p:spPr>
-        <p:txBody>
-          <a:bodyPr wrap="square" rtlCol="0" anchor="ctr"/>
-          <a:lstStyle/>
-          <a:p>
-            <a:pPr algn="ctr" indent="0" marL="0">
+        </p:spPr>
+        <p:txBody>
+          <a:bodyPr wrap="square" rtlCol="0" anchor="ctr"/>
+          <a:lstStyle/>
+          <a:p>
+            <a:pPr marL="0" indent="0" algn="ctr">
               <a:buNone/>
             </a:pPr>
             <a:r>
@@ -5306,9 +5209,9 @@
                 <a:solidFill>
                   <a:srgbClr val="FFFFFF"/>
                 </a:solidFill>
-                <a:latin typeface="Calibri" pitchFamily="34" charset="0"/>
-                <a:ea typeface="Calibri" pitchFamily="34" charset="-122"/>
-                <a:cs typeface="Calibri" pitchFamily="34" charset="-120"/>
+                <a:latin typeface="Calibri" panose="020F0502020204030204" pitchFamily="34" charset="0"/>
+                <a:ea typeface="Calibri" panose="020F0502020204030204" pitchFamily="34" charset="-122"/>
+                <a:cs typeface="Calibri" panose="020F0502020204030204" pitchFamily="34" charset="-120"/>
               </a:rPr>
               <a:t>5</a:t>
             </a:r>
@@ -5331,13 +5234,12 @@
             <a:avLst/>
           </a:prstGeom>
           <a:noFill/>
-          <a:ln/>
-        </p:spPr>
-        <p:txBody>
-          <a:bodyPr wrap="square" rtlCol="0" anchor="ctr"/>
-          <a:lstStyle/>
-          <a:p>
-            <a:pPr indent="0" marL="0">
+        </p:spPr>
+        <p:txBody>
+          <a:bodyPr wrap="square" rtlCol="0" anchor="ctr"/>
+          <a:lstStyle/>
+          <a:p>
+            <a:pPr marL="0" indent="0">
               <a:buNone/>
             </a:pPr>
             <a:r>
@@ -5345,9 +5247,9 @@
                 <a:solidFill>
                   <a:srgbClr val="028090"/>
                 </a:solidFill>
-                <a:latin typeface="Cambria" pitchFamily="34" charset="0"/>
-                <a:ea typeface="Cambria" pitchFamily="34" charset="-122"/>
-                <a:cs typeface="Cambria" pitchFamily="34" charset="-120"/>
+                <a:latin typeface="Cambria" panose="02040503050406030204" pitchFamily="34" charset="0"/>
+                <a:ea typeface="Cambria" panose="02040503050406030204" pitchFamily="34" charset="-122"/>
+                <a:cs typeface="Cambria" panose="02040503050406030204" pitchFamily="34" charset="-120"/>
               </a:rPr>
               <a:t>Testing &amp; Tooling</a:t>
             </a:r>
@@ -5370,13 +5272,12 @@
             <a:avLst/>
           </a:prstGeom>
           <a:noFill/>
-          <a:ln/>
-        </p:spPr>
-        <p:txBody>
-          <a:bodyPr wrap="square" rtlCol="0" anchor="ctr"/>
-          <a:lstStyle/>
-          <a:p>
-            <a:pPr indent="0" marL="0">
+        </p:spPr>
+        <p:txBody>
+          <a:bodyPr wrap="square" rtlCol="0" anchor="ctr"/>
+          <a:lstStyle/>
+          <a:p>
+            <a:pPr marL="0" indent="0">
               <a:lnSpc>
                 <a:spcPct val="115000"/>
               </a:lnSpc>
@@ -5387,9 +5288,9 @@
                 <a:solidFill>
                   <a:srgbClr val="16323A"/>
                 </a:solidFill>
-                <a:latin typeface="Calibri" pitchFamily="34" charset="0"/>
-                <a:ea typeface="Calibri" pitchFamily="34" charset="-122"/>
-                <a:cs typeface="Calibri" pitchFamily="34" charset="-120"/>
+                <a:latin typeface="Calibri" panose="020F0502020204030204" pitchFamily="34" charset="0"/>
+                <a:ea typeface="Calibri" panose="020F0502020204030204" pitchFamily="34" charset="-122"/>
+                <a:cs typeface="Calibri" panose="020F0502020204030204" pitchFamily="34" charset="-120"/>
               </a:rPr>
               <a:t>JUnit for correctness testing; Git/GitHub for version control and team collaboration</a:t>
             </a:r>
@@ -5412,13 +5313,12 @@
             <a:avLst/>
           </a:prstGeom>
           <a:noFill/>
-          <a:ln/>
-        </p:spPr>
-        <p:txBody>
-          <a:bodyPr wrap="square" rtlCol="0" anchor="ctr"/>
-          <a:lstStyle/>
-          <a:p>
-            <a:pPr algn="r" indent="0" marL="0">
+        </p:spPr>
+        <p:txBody>
+          <a:bodyPr wrap="square" rtlCol="0" anchor="ctr"/>
+          <a:lstStyle/>
+          <a:p>
+            <a:pPr marL="0" indent="0" algn="r">
               <a:buNone/>
             </a:pPr>
             <a:r>
@@ -5426,9 +5326,9 @@
                 <a:solidFill>
                   <a:srgbClr val="5B7A80"/>
                 </a:solidFill>
-                <a:latin typeface="Calibri" pitchFamily="34" charset="0"/>
-                <a:ea typeface="Calibri" pitchFamily="34" charset="-122"/>
-                <a:cs typeface="Calibri" pitchFamily="34" charset="-120"/>
+                <a:latin typeface="Calibri" panose="020F0502020204030204" pitchFamily="34" charset="0"/>
+                <a:ea typeface="Calibri" panose="020F0502020204030204" pitchFamily="34" charset="-122"/>
+                <a:cs typeface="Calibri" panose="020F0502020204030204" pitchFamily="34" charset="-120"/>
               </a:rPr>
               <a:t>05</a:t>
             </a:r>
@@ -5446,12 +5346,13 @@
 
 <file path=ppt/slides/slide6.xml><?xml version="1.0" encoding="utf-8"?>
 <p:sld xmlns:a="http://schemas.openxmlformats.org/drawingml/2006/main" xmlns:r="http://schemas.openxmlformats.org/officeDocument/2006/relationships" xmlns:p="http://schemas.openxmlformats.org/presentationml/2006/main">
-  <p:cSld name="Slide 6">
+  <p:cSld>
     <p:bg>
       <p:bgPr>
         <a:solidFill>
           <a:srgbClr val="023436"/>
         </a:solidFill>
+        <a:effectLst/>
       </p:bgPr>
     </p:bg>
     <p:spTree>
@@ -5483,13 +5384,12 @@
             <a:avLst/>
           </a:prstGeom>
           <a:noFill/>
-          <a:ln/>
-        </p:spPr>
-        <p:txBody>
-          <a:bodyPr wrap="square" rtlCol="0" anchor="ctr"/>
-          <a:lstStyle/>
-          <a:p>
-            <a:pPr indent="0" marL="0">
+        </p:spPr>
+        <p:txBody>
+          <a:bodyPr wrap="square" rtlCol="0" anchor="ctr"/>
+          <a:lstStyle/>
+          <a:p>
+            <a:pPr marL="0" indent="0">
               <a:buNone/>
             </a:pPr>
             <a:r>
@@ -5497,9 +5397,9 @@
                 <a:solidFill>
                   <a:srgbClr val="FFFFFF"/>
                 </a:solidFill>
-                <a:latin typeface="Cambria" pitchFamily="34" charset="0"/>
-                <a:ea typeface="Cambria" pitchFamily="34" charset="-122"/>
-                <a:cs typeface="Cambria" pitchFamily="34" charset="-120"/>
+                <a:latin typeface="Cambria" panose="02040503050406030204" pitchFamily="34" charset="0"/>
+                <a:ea typeface="Cambria" panose="02040503050406030204" pitchFamily="34" charset="-122"/>
+                <a:cs typeface="Cambria" panose="02040503050406030204" pitchFamily="34" charset="-120"/>
               </a:rPr>
               <a:t>Expected Outcome</a:t>
             </a:r>
@@ -5524,7 +5424,6 @@
           <a:solidFill>
             <a:srgbClr val="02C39A"/>
           </a:solidFill>
-          <a:ln/>
         </p:spPr>
       </p:sp>
       <p:sp>
@@ -5544,7 +5443,6 @@
           <a:solidFill>
             <a:srgbClr val="02C39A"/>
           </a:solidFill>
-          <a:ln/>
         </p:spPr>
       </p:sp>
       <p:sp>
@@ -5562,13 +5460,12 @@
             <a:avLst/>
           </a:prstGeom>
           <a:noFill/>
-          <a:ln/>
-        </p:spPr>
-        <p:txBody>
-          <a:bodyPr wrap="square" rtlCol="0" anchor="ctr"/>
-          <a:lstStyle/>
-          <a:p>
-            <a:pPr algn="ctr" indent="0" marL="0">
+        </p:spPr>
+        <p:txBody>
+          <a:bodyPr wrap="square" rtlCol="0" anchor="ctr"/>
+          <a:lstStyle/>
+          <a:p>
+            <a:pPr marL="0" indent="0" algn="ctr">
               <a:buNone/>
             </a:pPr>
             <a:r>
@@ -5576,9 +5473,9 @@
                 <a:solidFill>
                   <a:srgbClr val="023436"/>
                 </a:solidFill>
-                <a:latin typeface="Calibri" pitchFamily="34" charset="0"/>
-                <a:ea typeface="Calibri" pitchFamily="34" charset="-122"/>
-                <a:cs typeface="Calibri" pitchFamily="34" charset="-120"/>
+                <a:latin typeface="Calibri" panose="020F0502020204030204" pitchFamily="34" charset="0"/>
+                <a:ea typeface="Calibri" panose="020F0502020204030204" pitchFamily="34" charset="-122"/>
+                <a:cs typeface="Calibri" panose="020F0502020204030204" pitchFamily="34" charset="-120"/>
               </a:rPr>
               <a:t>1</a:t>
             </a:r>
@@ -5601,13 +5498,12 @@
             <a:avLst/>
           </a:prstGeom>
           <a:noFill/>
-          <a:ln/>
-        </p:spPr>
-        <p:txBody>
-          <a:bodyPr wrap="square" rtlCol="0" anchor="ctr"/>
-          <a:lstStyle/>
-          <a:p>
-            <a:pPr indent="0" marL="0">
+        </p:spPr>
+        <p:txBody>
+          <a:bodyPr wrap="square" rtlCol="0" anchor="ctr"/>
+          <a:lstStyle/>
+          <a:p>
+            <a:pPr marL="0" indent="0">
               <a:buNone/>
             </a:pPr>
             <a:r>
@@ -5615,9 +5511,9 @@
                 <a:solidFill>
                   <a:srgbClr val="FFFFFF"/>
                 </a:solidFill>
-                <a:latin typeface="Cambria" pitchFamily="34" charset="0"/>
-                <a:ea typeface="Cambria" pitchFamily="34" charset="-122"/>
-                <a:cs typeface="Cambria" pitchFamily="34" charset="-120"/>
+                <a:latin typeface="Cambria" panose="02040503050406030204" pitchFamily="34" charset="0"/>
+                <a:ea typeface="Cambria" panose="02040503050406030204" pitchFamily="34" charset="-122"/>
+                <a:cs typeface="Cambria" panose="02040503050406030204" pitchFamily="34" charset="-120"/>
               </a:rPr>
               <a:t>Instant, typo-tolerant course search</a:t>
             </a:r>
@@ -5640,13 +5536,12 @@
             <a:avLst/>
           </a:prstGeom>
           <a:noFill/>
-          <a:ln/>
-        </p:spPr>
-        <p:txBody>
-          <a:bodyPr wrap="square" rtlCol="0" anchor="ctr"/>
-          <a:lstStyle/>
-          <a:p>
-            <a:pPr indent="0" marL="0">
+        </p:spPr>
+        <p:txBody>
+          <a:bodyPr wrap="square" rtlCol="0" anchor="ctr"/>
+          <a:lstStyle/>
+          <a:p>
+            <a:pPr marL="0" indent="0">
               <a:buNone/>
             </a:pPr>
             <a:r>
@@ -5654,9 +5549,9 @@
                 <a:solidFill>
                   <a:srgbClr val="9FC9C5"/>
                 </a:solidFill>
-                <a:latin typeface="Calibri" pitchFamily="34" charset="0"/>
-                <a:ea typeface="Calibri" pitchFamily="34" charset="-122"/>
-                <a:cs typeface="Calibri" pitchFamily="34" charset="-120"/>
+                <a:latin typeface="Calibri" panose="020F0502020204030204" pitchFamily="34" charset="0"/>
+                <a:ea typeface="Calibri" panose="020F0502020204030204" pitchFamily="34" charset="-122"/>
+                <a:cs typeface="Calibri" panose="020F0502020204030204" pitchFamily="34" charset="-120"/>
               </a:rPr>
               <a:t>across the full catalog, in place of exact-match keyword lookup</a:t>
             </a:r>
@@ -5681,7 +5576,6 @@
           <a:solidFill>
             <a:srgbClr val="02C39A"/>
           </a:solidFill>
-          <a:ln/>
         </p:spPr>
       </p:sp>
       <p:sp>
@@ -5699,13 +5593,12 @@
             <a:avLst/>
           </a:prstGeom>
           <a:noFill/>
-          <a:ln/>
-        </p:spPr>
-        <p:txBody>
-          <a:bodyPr wrap="square" rtlCol="0" anchor="ctr"/>
-          <a:lstStyle/>
-          <a:p>
-            <a:pPr algn="ctr" indent="0" marL="0">
+        </p:spPr>
+        <p:txBody>
+          <a:bodyPr wrap="square" rtlCol="0" anchor="ctr"/>
+          <a:lstStyle/>
+          <a:p>
+            <a:pPr marL="0" indent="0" algn="ctr">
               <a:buNone/>
             </a:pPr>
             <a:r>
@@ -5713,9 +5606,9 @@
                 <a:solidFill>
                   <a:srgbClr val="023436"/>
                 </a:solidFill>
-                <a:latin typeface="Calibri" pitchFamily="34" charset="0"/>
-                <a:ea typeface="Calibri" pitchFamily="34" charset="-122"/>
-                <a:cs typeface="Calibri" pitchFamily="34" charset="-120"/>
+                <a:latin typeface="Calibri" panose="020F0502020204030204" pitchFamily="34" charset="0"/>
+                <a:ea typeface="Calibri" panose="020F0502020204030204" pitchFamily="34" charset="-122"/>
+                <a:cs typeface="Calibri" panose="020F0502020204030204" pitchFamily="34" charset="-120"/>
               </a:rPr>
               <a:t>2</a:t>
             </a:r>
@@ -5738,13 +5631,12 @@
             <a:avLst/>
           </a:prstGeom>
           <a:noFill/>
-          <a:ln/>
-        </p:spPr>
-        <p:txBody>
-          <a:bodyPr wrap="square" rtlCol="0" anchor="ctr"/>
-          <a:lstStyle/>
-          <a:p>
-            <a:pPr indent="0" marL="0">
+        </p:spPr>
+        <p:txBody>
+          <a:bodyPr wrap="square" rtlCol="0" anchor="ctr"/>
+          <a:lstStyle/>
+          <a:p>
+            <a:pPr marL="0" indent="0">
               <a:buNone/>
             </a:pPr>
             <a:r>
@@ -5752,9 +5644,9 @@
                 <a:solidFill>
                   <a:srgbClr val="FFFFFF"/>
                 </a:solidFill>
-                <a:latin typeface="Cambria" pitchFamily="34" charset="0"/>
-                <a:ea typeface="Cambria" pitchFamily="34" charset="-122"/>
-                <a:cs typeface="Cambria" pitchFamily="34" charset="-120"/>
+                <a:latin typeface="Cambria" panose="02040503050406030204" pitchFamily="34" charset="0"/>
+                <a:ea typeface="Cambria" panose="02040503050406030204" pitchFamily="34" charset="-122"/>
+                <a:cs typeface="Cambria" panose="02040503050406030204" pitchFamily="34" charset="-120"/>
               </a:rPr>
               <a:t>Personalized, similarity-ranked recommendations</a:t>
             </a:r>
@@ -5777,13 +5669,12 @@
             <a:avLst/>
           </a:prstGeom>
           <a:noFill/>
-          <a:ln/>
-        </p:spPr>
-        <p:txBody>
-          <a:bodyPr wrap="square" rtlCol="0" anchor="ctr"/>
-          <a:lstStyle/>
-          <a:p>
-            <a:pPr indent="0" marL="0">
+        </p:spPr>
+        <p:txBody>
+          <a:bodyPr wrap="square" rtlCol="0" anchor="ctr"/>
+          <a:lstStyle/>
+          <a:p>
+            <a:pPr marL="0" indent="0">
               <a:buNone/>
             </a:pPr>
             <a:r>
@@ -5791,9 +5682,9 @@
                 <a:solidFill>
                   <a:srgbClr val="9FC9C5"/>
                 </a:solidFill>
-                <a:latin typeface="Calibri" pitchFamily="34" charset="0"/>
-                <a:ea typeface="Calibri" pitchFamily="34" charset="-122"/>
-                <a:cs typeface="Calibri" pitchFamily="34" charset="-120"/>
+                <a:latin typeface="Calibri" panose="020F0502020204030204" pitchFamily="34" charset="0"/>
+                <a:ea typeface="Calibri" panose="020F0502020204030204" pitchFamily="34" charset="-122"/>
+                <a:cs typeface="Calibri" panose="020F0502020204030204" pitchFamily="34" charset="-120"/>
               </a:rPr>
               <a:t>aligned to each student's interests and academic history</a:t>
             </a:r>
@@ -5818,7 +5709,6 @@
           <a:solidFill>
             <a:srgbClr val="02C39A"/>
           </a:solidFill>
-          <a:ln/>
         </p:spPr>
       </p:sp>
       <p:sp>
@@ -5836,13 +5726,12 @@
             <a:avLst/>
           </a:prstGeom>
           <a:noFill/>
-          <a:ln/>
-        </p:spPr>
-        <p:txBody>
-          <a:bodyPr wrap="square" rtlCol="0" anchor="ctr"/>
-          <a:lstStyle/>
-          <a:p>
-            <a:pPr algn="ctr" indent="0" marL="0">
+        </p:spPr>
+        <p:txBody>
+          <a:bodyPr wrap="square" rtlCol="0" anchor="ctr"/>
+          <a:lstStyle/>
+          <a:p>
+            <a:pPr marL="0" indent="0" algn="ctr">
               <a:buNone/>
             </a:pPr>
             <a:r>
@@ -5850,9 +5739,9 @@
                 <a:solidFill>
                   <a:srgbClr val="023436"/>
                 </a:solidFill>
-                <a:latin typeface="Calibri" pitchFamily="34" charset="0"/>
-                <a:ea typeface="Calibri" pitchFamily="34" charset="-122"/>
-                <a:cs typeface="Calibri" pitchFamily="34" charset="-120"/>
+                <a:latin typeface="Calibri" panose="020F0502020204030204" pitchFamily="34" charset="0"/>
+                <a:ea typeface="Calibri" panose="020F0502020204030204" pitchFamily="34" charset="-122"/>
+                <a:cs typeface="Calibri" panose="020F0502020204030204" pitchFamily="34" charset="-120"/>
               </a:rPr>
               <a:t>3</a:t>
             </a:r>
@@ -5875,13 +5764,12 @@
             <a:avLst/>
           </a:prstGeom>
           <a:noFill/>
-          <a:ln/>
-        </p:spPr>
-        <p:txBody>
-          <a:bodyPr wrap="square" rtlCol="0" anchor="ctr"/>
-          <a:lstStyle/>
-          <a:p>
-            <a:pPr indent="0" marL="0">
+        </p:spPr>
+        <p:txBody>
+          <a:bodyPr wrap="square" rtlCol="0" anchor="ctr"/>
+          <a:lstStyle/>
+          <a:p>
+            <a:pPr marL="0" indent="0">
               <a:buNone/>
             </a:pPr>
             <a:r>
@@ -5889,9 +5777,9 @@
                 <a:solidFill>
                   <a:srgbClr val="FFFFFF"/>
                 </a:solidFill>
-                <a:latin typeface="Cambria" pitchFamily="34" charset="0"/>
-                <a:ea typeface="Cambria" pitchFamily="34" charset="-122"/>
-                <a:cs typeface="Cambria" pitchFamily="34" charset="-120"/>
+                <a:latin typeface="Cambria" panose="02040503050406030204" pitchFamily="34" charset="0"/>
+                <a:ea typeface="Cambria" panose="02040503050406030204" pitchFamily="34" charset="-122"/>
+                <a:cs typeface="Cambria" panose="02040503050406030204" pitchFamily="34" charset="-120"/>
               </a:rPr>
               <a:t>Automated prerequisite validation</a:t>
             </a:r>
@@ -5914,13 +5802,12 @@
             <a:avLst/>
           </a:prstGeom>
           <a:noFill/>
-          <a:ln/>
-        </p:spPr>
-        <p:txBody>
-          <a:bodyPr wrap="square" rtlCol="0" anchor="ctr"/>
-          <a:lstStyle/>
-          <a:p>
-            <a:pPr indent="0" marL="0">
+        </p:spPr>
+        <p:txBody>
+          <a:bodyPr wrap="square" rtlCol="0" anchor="ctr"/>
+          <a:lstStyle/>
+          <a:p>
+            <a:pPr marL="0" indent="0">
               <a:buNone/>
             </a:pPr>
             <a:r>
@@ -5928,9 +5815,9 @@
                 <a:solidFill>
                   <a:srgbClr val="9FC9C5"/>
                 </a:solidFill>
-                <a:latin typeface="Calibri" pitchFamily="34" charset="0"/>
-                <a:ea typeface="Calibri" pitchFamily="34" charset="-122"/>
-                <a:cs typeface="Calibri" pitchFamily="34" charset="-120"/>
+                <a:latin typeface="Calibri" panose="020F0502020204030204" pitchFamily="34" charset="0"/>
+                <a:ea typeface="Calibri" panose="020F0502020204030204" pitchFamily="34" charset="-122"/>
+                <a:cs typeface="Calibri" panose="020F0502020204030204" pitchFamily="34" charset="-120"/>
               </a:rPr>
               <a:t>so students only see courses they are actually eligible to take</a:t>
             </a:r>
@@ -5955,7 +5842,6 @@
           <a:solidFill>
             <a:srgbClr val="02C39A"/>
           </a:solidFill>
-          <a:ln/>
         </p:spPr>
       </p:sp>
       <p:sp>
@@ -5973,13 +5859,12 @@
             <a:avLst/>
           </a:prstGeom>
           <a:noFill/>
-          <a:ln/>
-        </p:spPr>
-        <p:txBody>
-          <a:bodyPr wrap="square" rtlCol="0" anchor="ctr"/>
-          <a:lstStyle/>
-          <a:p>
-            <a:pPr algn="ctr" indent="0" marL="0">
+        </p:spPr>
+        <p:txBody>
+          <a:bodyPr wrap="square" rtlCol="0" anchor="ctr"/>
+          <a:lstStyle/>
+          <a:p>
+            <a:pPr marL="0" indent="0" algn="ctr">
               <a:buNone/>
             </a:pPr>
             <a:r>
@@ -5987,9 +5872,9 @@
                 <a:solidFill>
                   <a:srgbClr val="023436"/>
                 </a:solidFill>
-                <a:latin typeface="Calibri" pitchFamily="34" charset="0"/>
-                <a:ea typeface="Calibri" pitchFamily="34" charset="-122"/>
-                <a:cs typeface="Calibri" pitchFamily="34" charset="-120"/>
+                <a:latin typeface="Calibri" panose="020F0502020204030204" pitchFamily="34" charset="0"/>
+                <a:ea typeface="Calibri" panose="020F0502020204030204" pitchFamily="34" charset="-122"/>
+                <a:cs typeface="Calibri" panose="020F0502020204030204" pitchFamily="34" charset="-120"/>
               </a:rPr>
               <a:t>4</a:t>
             </a:r>
@@ -6012,13 +5897,12 @@
             <a:avLst/>
           </a:prstGeom>
           <a:noFill/>
-          <a:ln/>
-        </p:spPr>
-        <p:txBody>
-          <a:bodyPr wrap="square" rtlCol="0" anchor="ctr"/>
-          <a:lstStyle/>
-          <a:p>
-            <a:pPr indent="0" marL="0">
+        </p:spPr>
+        <p:txBody>
+          <a:bodyPr wrap="square" rtlCol="0" anchor="ctr"/>
+          <a:lstStyle/>
+          <a:p>
+            <a:pPr marL="0" indent="0">
               <a:buNone/>
             </a:pPr>
             <a:r>
@@ -6026,9 +5910,9 @@
                 <a:solidFill>
                   <a:srgbClr val="FFFFFF"/>
                 </a:solidFill>
-                <a:latin typeface="Cambria" pitchFamily="34" charset="0"/>
-                <a:ea typeface="Cambria" pitchFamily="34" charset="-122"/>
-                <a:cs typeface="Cambria" pitchFamily="34" charset="-120"/>
+                <a:latin typeface="Cambria" panose="02040503050406030204" pitchFamily="34" charset="0"/>
+                <a:ea typeface="Cambria" panose="02040503050406030204" pitchFamily="34" charset="-122"/>
+                <a:cs typeface="Cambria" panose="02040503050406030204" pitchFamily="34" charset="-120"/>
               </a:rPr>
               <a:t>Near-optimal, credit-constrained course plans</a:t>
             </a:r>
@@ -6051,13 +5935,12 @@
             <a:avLst/>
           </a:prstGeom>
           <a:noFill/>
-          <a:ln/>
-        </p:spPr>
-        <p:txBody>
-          <a:bodyPr wrap="square" rtlCol="0" anchor="ctr"/>
-          <a:lstStyle/>
-          <a:p>
-            <a:pPr indent="0" marL="0">
+        </p:spPr>
+        <p:txBody>
+          <a:bodyPr wrap="square" rtlCol="0" anchor="ctr"/>
+          <a:lstStyle/>
+          <a:p>
+            <a:pPr marL="0" indent="0">
               <a:buNone/>
             </a:pPr>
             <a:r>
@@ -6065,9 +5948,9 @@
                 <a:solidFill>
                   <a:srgbClr val="9FC9C5"/>
                 </a:solidFill>
-                <a:latin typeface="Calibri" pitchFamily="34" charset="0"/>
-                <a:ea typeface="Calibri" pitchFamily="34" charset="-122"/>
-                <a:cs typeface="Calibri" pitchFamily="34" charset="-120"/>
+                <a:latin typeface="Calibri" panose="020F0502020204030204" pitchFamily="34" charset="0"/>
+                <a:ea typeface="Calibri" panose="020F0502020204030204" pitchFamily="34" charset="-122"/>
+                <a:cs typeface="Calibri" panose="020F0502020204030204" pitchFamily="34" charset="-120"/>
               </a:rPr>
               <a:t>generated in seconds via approximation and DP-based selection</a:t>
             </a:r>
@@ -6090,7 +5973,6 @@
             <a:avLst/>
           </a:prstGeom>
           <a:noFill/>
-          <a:ln/>
         </p:spPr>
       </p:sp>
       <p:sp>
@@ -6108,13 +5990,12 @@
             <a:avLst/>
           </a:prstGeom>
           <a:noFill/>
-          <a:ln/>
-        </p:spPr>
-        <p:txBody>
-          <a:bodyPr wrap="square" rtlCol="0" anchor="ctr"/>
-          <a:lstStyle/>
-          <a:p>
-            <a:pPr algn="r" indent="0" marL="0">
+        </p:spPr>
+        <p:txBody>
+          <a:bodyPr wrap="square" rtlCol="0" anchor="ctr"/>
+          <a:lstStyle/>
+          <a:p>
+            <a:pPr marL="0" indent="0" algn="r">
               <a:buNone/>
             </a:pPr>
             <a:r>
@@ -6122,9 +6003,9 @@
                 <a:solidFill>
                   <a:srgbClr val="5B7A80"/>
                 </a:solidFill>
-                <a:latin typeface="Calibri" pitchFamily="34" charset="0"/>
-                <a:ea typeface="Calibri" pitchFamily="34" charset="-122"/>
-                <a:cs typeface="Calibri" pitchFamily="34" charset="-120"/>
+                <a:latin typeface="Calibri" panose="020F0502020204030204" pitchFamily="34" charset="0"/>
+                <a:ea typeface="Calibri" panose="020F0502020204030204" pitchFamily="34" charset="-122"/>
+                <a:cs typeface="Calibri" panose="020F0502020204030204" pitchFamily="34" charset="-120"/>
               </a:rPr>
               <a:t>06</a:t>
             </a:r>
@@ -6183,7 +6064,7 @@
     </a:clrScheme>
     <a:fontScheme name="Office">
       <a:majorFont>
-        <a:latin typeface="Calibri Light" panose="020F0302020204030204"/>
+        <a:latin typeface="Calibri Light"/>
         <a:ea typeface=""/>
         <a:cs typeface=""/>
         <a:font script="Jpan" typeface="游ゴシック Light"/>
@@ -6216,26 +6097,9 @@
         <a:font script="Viet" typeface="Times New Roman"/>
         <a:font script="Uigh" typeface="Microsoft Uighur"/>
         <a:font script="Geor" typeface="Sylfaen"/>
-        <a:font script="Armn" typeface="Arial"/>
-        <a:font script="Bugi" typeface="Leelawadee UI"/>
-        <a:font script="Bopo" typeface="Microsoft JhengHei"/>
-        <a:font script="Java" typeface="Javanese Text"/>
-        <a:font script="Lisu" typeface="Segoe UI"/>
-        <a:font script="Mymr" typeface="Myanmar Text"/>
-        <a:font script="Nkoo" typeface="Ebrima"/>
-        <a:font script="Olck" typeface="Nirmala UI"/>
-        <a:font script="Osma" typeface="Ebrima"/>
-        <a:font script="Phag" typeface="Phagspa"/>
-        <a:font script="Syrn" typeface="Estrangelo Edessa"/>
-        <a:font script="Syrj" typeface="Estrangelo Edessa"/>
-        <a:font script="Syre" typeface="Estrangelo Edessa"/>
-        <a:font script="Sora" typeface="Nirmala UI"/>
-        <a:font script="Tale" typeface="Microsoft Tai Le"/>
-        <a:font script="Talu" typeface="Microsoft New Tai Lue"/>
-        <a:font script="Tfng" typeface="Ebrima"/>
       </a:majorFont>
       <a:minorFont>
-        <a:latin typeface="Calibri" panose="020F0502020204030204"/>
+        <a:latin typeface="Calibri"/>
         <a:ea typeface=""/>
         <a:cs typeface=""/>
         <a:font script="Jpan" typeface="游ゴシック"/>
@@ -6268,23 +6132,6 @@
         <a:font script="Viet" typeface="Arial"/>
         <a:font script="Uigh" typeface="Microsoft Uighur"/>
         <a:font script="Geor" typeface="Sylfaen"/>
-        <a:font script="Armn" typeface="Arial"/>
-        <a:font script="Bugi" typeface="Leelawadee UI"/>
-        <a:font script="Bopo" typeface="Microsoft JhengHei"/>
-        <a:font script="Java" typeface="Javanese Text"/>
-        <a:font script="Lisu" typeface="Segoe UI"/>
-        <a:font script="Mymr" typeface="Myanmar Text"/>
-        <a:font script="Nkoo" typeface="Ebrima"/>
-        <a:font script="Olck" typeface="Nirmala UI"/>
-        <a:font script="Osma" typeface="Ebrima"/>
-        <a:font script="Phag" typeface="Phagspa"/>
-        <a:font script="Syrn" typeface="Estrangelo Edessa"/>
-        <a:font script="Syrj" typeface="Estrangelo Edessa"/>
-        <a:font script="Syre" typeface="Estrangelo Edessa"/>
-        <a:font script="Sora" typeface="Nirmala UI"/>
-        <a:font script="Tale" typeface="Microsoft Tai Le"/>
-        <a:font script="Talu" typeface="Microsoft New Tai Lue"/>
-        <a:font script="Tfng" typeface="Ebrima"/>
       </a:minorFont>
     </a:fontScheme>
     <a:fmtScheme name="Office">
@@ -6425,8 +6272,265 @@
       </a:bgFillStyleLst>
     </a:fmtScheme>
   </a:themeElements>
-  <a:objectDefaults/>
-  <a:extraClrSchemeLst/>
+  <a:extLst>
+    <a:ext uri="{05A4C25C-085E-4340-85A3-A5531E510DB2}">
+      <thm15:themeFamily xmlns:thm15="http://schemas.microsoft.com/office/thememl/2012/main" name="Office Theme" id="{62F939B6-93AF-4DB8-9C6B-D6C7DFDC589F}" vid="{4A3C46E8-61CC-4603-A589-7422A47A8E4A}"/>
+    </a:ext>
+  </a:extLst>
+</a:theme>
+</file>
+
+<file path=ppt/theme/theme2.xml><?xml version="1.0" encoding="utf-8"?>
+<a:theme xmlns:a="http://schemas.openxmlformats.org/drawingml/2006/main" name="Office Theme">
+  <a:themeElements>
+    <a:clrScheme name="Office">
+      <a:dk1>
+        <a:sysClr val="windowText" lastClr="000000"/>
+      </a:dk1>
+      <a:lt1>
+        <a:sysClr val="window" lastClr="FFFFFF"/>
+      </a:lt1>
+      <a:dk2>
+        <a:srgbClr val="44546A"/>
+      </a:dk2>
+      <a:lt2>
+        <a:srgbClr val="E7E6E6"/>
+      </a:lt2>
+      <a:accent1>
+        <a:srgbClr val="4472C4"/>
+      </a:accent1>
+      <a:accent2>
+        <a:srgbClr val="ED7D31"/>
+      </a:accent2>
+      <a:accent3>
+        <a:srgbClr val="A5A5A5"/>
+      </a:accent3>
+      <a:accent4>
+        <a:srgbClr val="FFC000"/>
+      </a:accent4>
+      <a:accent5>
+        <a:srgbClr val="5B9BD5"/>
+      </a:accent5>
+      <a:accent6>
+        <a:srgbClr val="70AD47"/>
+      </a:accent6>
+      <a:hlink>
+        <a:srgbClr val="0563C1"/>
+      </a:hlink>
+      <a:folHlink>
+        <a:srgbClr val="954F72"/>
+      </a:folHlink>
+    </a:clrScheme>
+    <a:fontScheme name="Office">
+      <a:majorFont>
+        <a:latin typeface="Calibri Light"/>
+        <a:ea typeface=""/>
+        <a:cs typeface=""/>
+        <a:font script="Jpan" typeface="游ゴシック Light"/>
+        <a:font script="Hang" typeface="맑은 고딕"/>
+        <a:font script="Hans" typeface="等线 Light"/>
+        <a:font script="Hant" typeface="新細明體"/>
+        <a:font script="Arab" typeface="Times New Roman"/>
+        <a:font script="Hebr" typeface="Times New Roman"/>
+        <a:font script="Thai" typeface="Angsana New"/>
+        <a:font script="Ethi" typeface="Nyala"/>
+        <a:font script="Beng" typeface="Vrinda"/>
+        <a:font script="Gujr" typeface="Shruti"/>
+        <a:font script="Khmr" typeface="MoolBoran"/>
+        <a:font script="Knda" typeface="Tunga"/>
+        <a:font script="Guru" typeface="Raavi"/>
+        <a:font script="Cans" typeface="Euphemia"/>
+        <a:font script="Cher" typeface="Plantagenet Cherokee"/>
+        <a:font script="Yiii" typeface="Microsoft Yi Baiti"/>
+        <a:font script="Tibt" typeface="Microsoft Himalaya"/>
+        <a:font script="Thaa" typeface="MV Boli"/>
+        <a:font script="Deva" typeface="Mangal"/>
+        <a:font script="Telu" typeface="Gautami"/>
+        <a:font script="Taml" typeface="Latha"/>
+        <a:font script="Syrc" typeface="Estrangelo Edessa"/>
+        <a:font script="Orya" typeface="Kalinga"/>
+        <a:font script="Mlym" typeface="Kartika"/>
+        <a:font script="Laoo" typeface="DokChampa"/>
+        <a:font script="Sinh" typeface="Iskoola Pota"/>
+        <a:font script="Mong" typeface="Mongolian Baiti"/>
+        <a:font script="Viet" typeface="Times New Roman"/>
+        <a:font script="Uigh" typeface="Microsoft Uighur"/>
+        <a:font script="Geor" typeface="Sylfaen"/>
+      </a:majorFont>
+      <a:minorFont>
+        <a:latin typeface="Calibri"/>
+        <a:ea typeface=""/>
+        <a:cs typeface=""/>
+        <a:font script="Jpan" typeface="游ゴシック"/>
+        <a:font script="Hang" typeface="맑은 고딕"/>
+        <a:font script="Hans" typeface="等线"/>
+        <a:font script="Hant" typeface="新細明體"/>
+        <a:font script="Arab" typeface="Arial"/>
+        <a:font script="Hebr" typeface="Arial"/>
+        <a:font script="Thai" typeface="Cordia New"/>
+        <a:font script="Ethi" typeface="Nyala"/>
+        <a:font script="Beng" typeface="Vrinda"/>
+        <a:font script="Gujr" typeface="Shruti"/>
+        <a:font script="Khmr" typeface="DaunPenh"/>
+        <a:font script="Knda" typeface="Tunga"/>
+        <a:font script="Guru" typeface="Raavi"/>
+        <a:font script="Cans" typeface="Euphemia"/>
+        <a:font script="Cher" typeface="Plantagenet Cherokee"/>
+        <a:font script="Yiii" typeface="Microsoft Yi Baiti"/>
+        <a:font script="Tibt" typeface="Microsoft Himalaya"/>
+        <a:font script="Thaa" typeface="MV Boli"/>
+        <a:font script="Deva" typeface="Mangal"/>
+        <a:font script="Telu" typeface="Gautami"/>
+        <a:font script="Taml" typeface="Latha"/>
+        <a:font script="Syrc" typeface="Estrangelo Edessa"/>
+        <a:font script="Orya" typeface="Kalinga"/>
+        <a:font script="Mlym" typeface="Kartika"/>
+        <a:font script="Laoo" typeface="DokChampa"/>
+        <a:font script="Sinh" typeface="Iskoola Pota"/>
+        <a:font script="Mong" typeface="Mongolian Baiti"/>
+        <a:font script="Viet" typeface="Arial"/>
+        <a:font script="Uigh" typeface="Microsoft Uighur"/>
+        <a:font script="Geor" typeface="Sylfaen"/>
+      </a:minorFont>
+    </a:fontScheme>
+    <a:fmtScheme name="Office">
+      <a:fillStyleLst>
+        <a:solidFill>
+          <a:schemeClr val="phClr"/>
+        </a:solidFill>
+        <a:gradFill rotWithShape="1">
+          <a:gsLst>
+            <a:gs pos="0">
+              <a:schemeClr val="phClr">
+                <a:lumMod val="110000"/>
+                <a:satMod val="105000"/>
+                <a:tint val="67000"/>
+              </a:schemeClr>
+            </a:gs>
+            <a:gs pos="50000">
+              <a:schemeClr val="phClr">
+                <a:lumMod val="105000"/>
+                <a:satMod val="103000"/>
+                <a:tint val="73000"/>
+              </a:schemeClr>
+            </a:gs>
+            <a:gs pos="100000">
+              <a:schemeClr val="phClr">
+                <a:lumMod val="105000"/>
+                <a:satMod val="109000"/>
+                <a:tint val="81000"/>
+              </a:schemeClr>
+            </a:gs>
+          </a:gsLst>
+          <a:lin ang="5400000" scaled="0"/>
+        </a:gradFill>
+        <a:gradFill rotWithShape="1">
+          <a:gsLst>
+            <a:gs pos="0">
+              <a:schemeClr val="phClr">
+                <a:satMod val="103000"/>
+                <a:lumMod val="102000"/>
+                <a:tint val="94000"/>
+              </a:schemeClr>
+            </a:gs>
+            <a:gs pos="50000">
+              <a:schemeClr val="phClr">
+                <a:satMod val="110000"/>
+                <a:lumMod val="100000"/>
+                <a:shade val="100000"/>
+              </a:schemeClr>
+            </a:gs>
+            <a:gs pos="100000">
+              <a:schemeClr val="phClr">
+                <a:lumMod val="99000"/>
+                <a:satMod val="120000"/>
+                <a:shade val="78000"/>
+              </a:schemeClr>
+            </a:gs>
+          </a:gsLst>
+          <a:lin ang="5400000" scaled="0"/>
+        </a:gradFill>
+      </a:fillStyleLst>
+      <a:lnStyleLst>
+        <a:ln w="6350" cap="flat" cmpd="sng" algn="ctr">
+          <a:solidFill>
+            <a:schemeClr val="phClr"/>
+          </a:solidFill>
+          <a:prstDash val="solid"/>
+          <a:miter lim="800000"/>
+        </a:ln>
+        <a:ln w="12700" cap="flat" cmpd="sng" algn="ctr">
+          <a:solidFill>
+            <a:schemeClr val="phClr"/>
+          </a:solidFill>
+          <a:prstDash val="solid"/>
+          <a:miter lim="800000"/>
+        </a:ln>
+        <a:ln w="19050" cap="flat" cmpd="sng" algn="ctr">
+          <a:solidFill>
+            <a:schemeClr val="phClr"/>
+          </a:solidFill>
+          <a:prstDash val="solid"/>
+          <a:miter lim="800000"/>
+        </a:ln>
+      </a:lnStyleLst>
+      <a:effectStyleLst>
+        <a:effectStyle>
+          <a:effectLst/>
+        </a:effectStyle>
+        <a:effectStyle>
+          <a:effectLst/>
+        </a:effectStyle>
+        <a:effectStyle>
+          <a:effectLst>
+            <a:outerShdw blurRad="57150" dist="19050" dir="5400000" algn="ctr" rotWithShape="0">
+              <a:srgbClr val="000000">
+                <a:alpha val="63000"/>
+              </a:srgbClr>
+            </a:outerShdw>
+          </a:effectLst>
+        </a:effectStyle>
+      </a:effectStyleLst>
+      <a:bgFillStyleLst>
+        <a:solidFill>
+          <a:schemeClr val="phClr"/>
+        </a:solidFill>
+        <a:solidFill>
+          <a:schemeClr val="phClr">
+            <a:tint val="95000"/>
+            <a:satMod val="170000"/>
+          </a:schemeClr>
+        </a:solidFill>
+        <a:gradFill rotWithShape="1">
+          <a:gsLst>
+            <a:gs pos="0">
+              <a:schemeClr val="phClr">
+                <a:tint val="93000"/>
+                <a:satMod val="150000"/>
+                <a:shade val="98000"/>
+                <a:lumMod val="102000"/>
+              </a:schemeClr>
+            </a:gs>
+            <a:gs pos="50000">
+              <a:schemeClr val="phClr">
+                <a:tint val="98000"/>
+                <a:satMod val="130000"/>
+                <a:shade val="90000"/>
+                <a:lumMod val="103000"/>
+              </a:schemeClr>
+            </a:gs>
+            <a:gs pos="100000">
+              <a:schemeClr val="phClr">
+                <a:shade val="63000"/>
+                <a:satMod val="120000"/>
+              </a:schemeClr>
+            </a:gs>
+          </a:gsLst>
+          <a:lin ang="5400000" scaled="0"/>
+        </a:gradFill>
+      </a:bgFillStyleLst>
+    </a:fmtScheme>
+  </a:themeElements>
   <a:extLst>
     <a:ext uri="{05A4C25C-085E-4340-85A3-A5531E510DB2}">
       <thm15:themeFamily xmlns:thm15="http://schemas.microsoft.com/office/thememl/2012/main" name="Office Theme" id="{62F939B6-93AF-4DB8-9C6B-D6C7DFDC589F}" vid="{4A3C46E8-61CC-4603-A589-7422A47A8E4A}"/>
